--- a/docs/pptx/entire/ritu-entire-linsubhr-sens-death_10pct.pptx
+++ b/docs/pptx/entire/ritu-entire-linsubhr-sens-death_10pct.pptx
@@ -3390,557 +3390,557 @@
           <p:spPr>
             <a:xfrm>
               <a:off x="1172049" y="2073503"/>
-              <a:ext cx="7090630" cy="3457919"/>
+              <a:ext cx="7090630" cy="3458147"/>
             </a:xfrm>
             <a:custGeom>
               <a:avLst/>
               <a:pathLst>
-                <a:path w="7090630" h="3457919">
+                <a:path w="7090630" h="3458147">
                   <a:moveTo>
-                    <a:pt x="1356024" y="0"/>
+                    <a:pt x="1360175" y="0"/>
                   </a:moveTo>
                   <a:lnTo>
-                    <a:pt x="1360827" y="14697"/>
-                  </a:lnTo>
-                  <a:lnTo>
-                    <a:pt x="1432450" y="220808"/>
-                  </a:lnTo>
-                  <a:lnTo>
-                    <a:pt x="1504073" y="414674"/>
-                  </a:lnTo>
-                  <a:lnTo>
-                    <a:pt x="1575695" y="597021"/>
-                  </a:lnTo>
-                  <a:lnTo>
-                    <a:pt x="1647318" y="768534"/>
-                  </a:lnTo>
-                  <a:lnTo>
-                    <a:pt x="1718940" y="929856"/>
-                  </a:lnTo>
-                  <a:lnTo>
-                    <a:pt x="1790563" y="1081594"/>
-                  </a:lnTo>
-                  <a:lnTo>
-                    <a:pt x="1862185" y="1224317"/>
-                  </a:lnTo>
-                  <a:lnTo>
-                    <a:pt x="1933808" y="1358559"/>
-                  </a:lnTo>
-                  <a:lnTo>
-                    <a:pt x="2005430" y="1484826"/>
-                  </a:lnTo>
-                  <a:lnTo>
-                    <a:pt x="2077053" y="1603590"/>
-                  </a:lnTo>
-                  <a:lnTo>
-                    <a:pt x="2148675" y="1715299"/>
-                  </a:lnTo>
-                  <a:lnTo>
-                    <a:pt x="2220298" y="1820370"/>
-                  </a:lnTo>
-                  <a:lnTo>
-                    <a:pt x="2291920" y="1919198"/>
-                  </a:lnTo>
-                  <a:lnTo>
-                    <a:pt x="2363543" y="2012155"/>
-                  </a:lnTo>
-                  <a:lnTo>
-                    <a:pt x="2435165" y="2099589"/>
-                  </a:lnTo>
-                  <a:lnTo>
-                    <a:pt x="2506788" y="2181827"/>
-                  </a:lnTo>
-                  <a:lnTo>
-                    <a:pt x="2578410" y="2259180"/>
-                  </a:lnTo>
-                  <a:lnTo>
-                    <a:pt x="2650033" y="2331937"/>
-                  </a:lnTo>
-                  <a:lnTo>
-                    <a:pt x="2721655" y="2400371"/>
-                  </a:lnTo>
-                  <a:lnTo>
-                    <a:pt x="2793278" y="2464739"/>
-                  </a:lnTo>
-                  <a:lnTo>
-                    <a:pt x="2864901" y="2525283"/>
-                  </a:lnTo>
-                  <a:lnTo>
-                    <a:pt x="2936523" y="2582229"/>
-                  </a:lnTo>
-                  <a:lnTo>
-                    <a:pt x="3008146" y="2635792"/>
-                  </a:lnTo>
-                  <a:lnTo>
-                    <a:pt x="3079768" y="2666732"/>
-                  </a:lnTo>
-                  <a:lnTo>
-                    <a:pt x="3151391" y="2685808"/>
-                  </a:lnTo>
-                  <a:lnTo>
-                    <a:pt x="3223013" y="2704439"/>
-                  </a:lnTo>
-                  <a:lnTo>
-                    <a:pt x="3294636" y="2722635"/>
-                  </a:lnTo>
-                  <a:lnTo>
-                    <a:pt x="3366258" y="2740407"/>
-                  </a:lnTo>
-                  <a:lnTo>
-                    <a:pt x="3437881" y="2757763"/>
-                  </a:lnTo>
-                  <a:lnTo>
-                    <a:pt x="3509503" y="2774714"/>
-                  </a:lnTo>
-                  <a:lnTo>
-                    <a:pt x="3581126" y="2791269"/>
-                  </a:lnTo>
-                  <a:lnTo>
-                    <a:pt x="3652748" y="2807438"/>
-                  </a:lnTo>
-                  <a:lnTo>
-                    <a:pt x="3724371" y="2823229"/>
-                  </a:lnTo>
-                  <a:lnTo>
-                    <a:pt x="3795993" y="2838651"/>
-                  </a:lnTo>
-                  <a:lnTo>
-                    <a:pt x="3867616" y="2853714"/>
-                  </a:lnTo>
-                  <a:lnTo>
-                    <a:pt x="3939238" y="2868424"/>
-                  </a:lnTo>
-                  <a:lnTo>
-                    <a:pt x="4010861" y="2882792"/>
-                  </a:lnTo>
-                  <a:lnTo>
-                    <a:pt x="4082483" y="2896823"/>
-                  </a:lnTo>
-                  <a:lnTo>
-                    <a:pt x="4154106" y="2910528"/>
-                  </a:lnTo>
-                  <a:lnTo>
-                    <a:pt x="4225729" y="2923912"/>
-                  </a:lnTo>
-                  <a:lnTo>
-                    <a:pt x="4297351" y="2936983"/>
-                  </a:lnTo>
-                  <a:lnTo>
-                    <a:pt x="4368974" y="2949750"/>
-                  </a:lnTo>
-                  <a:lnTo>
-                    <a:pt x="4440596" y="2962218"/>
-                  </a:lnTo>
-                  <a:lnTo>
-                    <a:pt x="4512219" y="2974395"/>
-                  </a:lnTo>
-                  <a:lnTo>
-                    <a:pt x="4583841" y="2986288"/>
-                  </a:lnTo>
-                  <a:lnTo>
-                    <a:pt x="4655464" y="2997903"/>
-                  </a:lnTo>
-                  <a:lnTo>
-                    <a:pt x="4727086" y="3009247"/>
-                  </a:lnTo>
-                  <a:lnTo>
-                    <a:pt x="4798709" y="3020326"/>
-                  </a:lnTo>
-                  <a:lnTo>
-                    <a:pt x="4870331" y="3031147"/>
-                  </a:lnTo>
-                  <a:lnTo>
-                    <a:pt x="4941954" y="3041715"/>
-                  </a:lnTo>
-                  <a:lnTo>
-                    <a:pt x="5013576" y="3052036"/>
-                  </a:lnTo>
-                  <a:lnTo>
-                    <a:pt x="5085199" y="3062116"/>
-                  </a:lnTo>
-                  <a:lnTo>
-                    <a:pt x="5156821" y="3071960"/>
-                  </a:lnTo>
-                  <a:lnTo>
-                    <a:pt x="5228444" y="3081575"/>
-                  </a:lnTo>
-                  <a:lnTo>
-                    <a:pt x="5300066" y="3090965"/>
-                  </a:lnTo>
-                  <a:lnTo>
-                    <a:pt x="5371689" y="3100136"/>
-                  </a:lnTo>
-                  <a:lnTo>
-                    <a:pt x="5443311" y="3109093"/>
-                  </a:lnTo>
-                  <a:lnTo>
-                    <a:pt x="5514934" y="3117841"/>
-                  </a:lnTo>
-                  <a:lnTo>
-                    <a:pt x="5586557" y="3126385"/>
-                  </a:lnTo>
-                  <a:lnTo>
-                    <a:pt x="5658179" y="3134729"/>
-                  </a:lnTo>
-                  <a:lnTo>
-                    <a:pt x="5729802" y="3142878"/>
-                  </a:lnTo>
-                  <a:lnTo>
-                    <a:pt x="5801424" y="3150837"/>
-                  </a:lnTo>
-                  <a:lnTo>
-                    <a:pt x="5873047" y="3158610"/>
-                  </a:lnTo>
-                  <a:lnTo>
-                    <a:pt x="5944669" y="3166202"/>
-                  </a:lnTo>
-                  <a:lnTo>
-                    <a:pt x="6016292" y="3173616"/>
-                  </a:lnTo>
-                  <a:lnTo>
-                    <a:pt x="6087914" y="3180857"/>
-                  </a:lnTo>
-                  <a:lnTo>
-                    <a:pt x="6159537" y="3187930"/>
-                  </a:lnTo>
-                  <a:lnTo>
-                    <a:pt x="6231159" y="3194837"/>
-                  </a:lnTo>
-                  <a:lnTo>
-                    <a:pt x="6302782" y="3201582"/>
-                  </a:lnTo>
-                  <a:lnTo>
-                    <a:pt x="6374404" y="3208171"/>
-                  </a:lnTo>
-                  <a:lnTo>
-                    <a:pt x="6446027" y="3214605"/>
-                  </a:lnTo>
-                  <a:lnTo>
-                    <a:pt x="6517649" y="3220889"/>
-                  </a:lnTo>
-                  <a:lnTo>
-                    <a:pt x="6589272" y="3227027"/>
-                  </a:lnTo>
-                  <a:lnTo>
-                    <a:pt x="6660894" y="3233021"/>
-                  </a:lnTo>
-                  <a:lnTo>
-                    <a:pt x="6732517" y="3238875"/>
-                  </a:lnTo>
-                  <a:lnTo>
-                    <a:pt x="6804139" y="3244593"/>
-                  </a:lnTo>
-                  <a:lnTo>
-                    <a:pt x="6875762" y="3250177"/>
-                  </a:lnTo>
-                  <a:lnTo>
-                    <a:pt x="6947385" y="3255630"/>
-                  </a:lnTo>
-                  <a:lnTo>
-                    <a:pt x="7019007" y="3260957"/>
-                  </a:lnTo>
-                  <a:lnTo>
-                    <a:pt x="7090630" y="3266158"/>
-                  </a:lnTo>
-                  <a:lnTo>
-                    <a:pt x="7090630" y="3457919"/>
-                  </a:lnTo>
-                  <a:lnTo>
-                    <a:pt x="7019007" y="3456288"/>
-                  </a:lnTo>
-                  <a:lnTo>
-                    <a:pt x="6947385" y="3454553"/>
-                  </a:lnTo>
-                  <a:lnTo>
-                    <a:pt x="6875762" y="3452709"/>
-                  </a:lnTo>
-                  <a:lnTo>
-                    <a:pt x="6804139" y="3450749"/>
-                  </a:lnTo>
-                  <a:lnTo>
-                    <a:pt x="6732517" y="3448664"/>
-                  </a:lnTo>
-                  <a:lnTo>
-                    <a:pt x="6660894" y="3446448"/>
-                  </a:lnTo>
-                  <a:lnTo>
-                    <a:pt x="6589272" y="3444092"/>
-                  </a:lnTo>
-                  <a:lnTo>
-                    <a:pt x="6517649" y="3441587"/>
-                  </a:lnTo>
-                  <a:lnTo>
-                    <a:pt x="6446027" y="3438924"/>
-                  </a:lnTo>
-                  <a:lnTo>
-                    <a:pt x="6374404" y="3436093"/>
-                  </a:lnTo>
-                  <a:lnTo>
-                    <a:pt x="6302782" y="3433083"/>
-                  </a:lnTo>
-                  <a:lnTo>
-                    <a:pt x="6231159" y="3429883"/>
-                  </a:lnTo>
-                  <a:lnTo>
-                    <a:pt x="6159537" y="3426480"/>
-                  </a:lnTo>
-                  <a:lnTo>
-                    <a:pt x="6087914" y="3422863"/>
-                  </a:lnTo>
-                  <a:lnTo>
-                    <a:pt x="6016292" y="3419017"/>
-                  </a:lnTo>
-                  <a:lnTo>
-                    <a:pt x="5944669" y="3414928"/>
-                  </a:lnTo>
-                  <a:lnTo>
-                    <a:pt x="5873047" y="3410581"/>
-                  </a:lnTo>
-                  <a:lnTo>
-                    <a:pt x="5801424" y="3405959"/>
-                  </a:lnTo>
-                  <a:lnTo>
-                    <a:pt x="5729802" y="3401046"/>
-                  </a:lnTo>
-                  <a:lnTo>
-                    <a:pt x="5658179" y="3395822"/>
-                  </a:lnTo>
-                  <a:lnTo>
-                    <a:pt x="5586557" y="3390268"/>
-                  </a:lnTo>
-                  <a:lnTo>
-                    <a:pt x="5514934" y="3384363"/>
-                  </a:lnTo>
-                  <a:lnTo>
-                    <a:pt x="5443311" y="3378085"/>
-                  </a:lnTo>
-                  <a:lnTo>
-                    <a:pt x="5371689" y="3371411"/>
-                  </a:lnTo>
-                  <a:lnTo>
-                    <a:pt x="5300066" y="3364315"/>
-                  </a:lnTo>
-                  <a:lnTo>
-                    <a:pt x="5228444" y="3356771"/>
-                  </a:lnTo>
-                  <a:lnTo>
-                    <a:pt x="5156821" y="3348750"/>
-                  </a:lnTo>
-                  <a:lnTo>
-                    <a:pt x="5085199" y="3340223"/>
-                  </a:lnTo>
-                  <a:lnTo>
-                    <a:pt x="5013576" y="3331156"/>
-                  </a:lnTo>
-                  <a:lnTo>
-                    <a:pt x="4941954" y="3321518"/>
-                  </a:lnTo>
-                  <a:lnTo>
-                    <a:pt x="4870331" y="3311270"/>
-                  </a:lnTo>
-                  <a:lnTo>
-                    <a:pt x="4798709" y="3300375"/>
-                  </a:lnTo>
-                  <a:lnTo>
-                    <a:pt x="4727086" y="3288792"/>
-                  </a:lnTo>
-                  <a:lnTo>
-                    <a:pt x="4655464" y="3276477"/>
-                  </a:lnTo>
-                  <a:lnTo>
-                    <a:pt x="4583841" y="3263385"/>
-                  </a:lnTo>
-                  <a:lnTo>
-                    <a:pt x="4512219" y="3249465"/>
-                  </a:lnTo>
-                  <a:lnTo>
-                    <a:pt x="4440596" y="3234666"/>
-                  </a:lnTo>
-                  <a:lnTo>
-                    <a:pt x="4368974" y="3218932"/>
-                  </a:lnTo>
-                  <a:lnTo>
-                    <a:pt x="4297351" y="3202205"/>
-                  </a:lnTo>
-                  <a:lnTo>
-                    <a:pt x="4225729" y="3184421"/>
-                  </a:lnTo>
-                  <a:lnTo>
-                    <a:pt x="4154106" y="3165513"/>
-                  </a:lnTo>
-                  <a:lnTo>
-                    <a:pt x="4082483" y="3145411"/>
-                  </a:lnTo>
-                  <a:lnTo>
-                    <a:pt x="4010861" y="3124039"/>
-                  </a:lnTo>
-                  <a:lnTo>
-                    <a:pt x="3939238" y="3101317"/>
-                  </a:lnTo>
-                  <a:lnTo>
-                    <a:pt x="3867616" y="3077160"/>
-                  </a:lnTo>
-                  <a:lnTo>
-                    <a:pt x="3795993" y="3051477"/>
-                  </a:lnTo>
-                  <a:lnTo>
-                    <a:pt x="3724371" y="3024172"/>
-                  </a:lnTo>
-                  <a:lnTo>
-                    <a:pt x="3652748" y="2995142"/>
-                  </a:lnTo>
-                  <a:lnTo>
-                    <a:pt x="3581126" y="2964278"/>
-                  </a:lnTo>
-                  <a:lnTo>
-                    <a:pt x="3509503" y="2931465"/>
-                  </a:lnTo>
-                  <a:lnTo>
-                    <a:pt x="3437881" y="2896578"/>
-                  </a:lnTo>
-                  <a:lnTo>
-                    <a:pt x="3366258" y="2859489"/>
-                  </a:lnTo>
-                  <a:lnTo>
-                    <a:pt x="3294636" y="2820056"/>
-                  </a:lnTo>
-                  <a:lnTo>
-                    <a:pt x="3223013" y="2778132"/>
-                  </a:lnTo>
-                  <a:lnTo>
-                    <a:pt x="3151391" y="2733560"/>
-                  </a:lnTo>
-                  <a:lnTo>
-                    <a:pt x="3079768" y="2686173"/>
-                  </a:lnTo>
-                  <a:lnTo>
-                    <a:pt x="3008146" y="2647199"/>
-                  </a:lnTo>
-                  <a:lnTo>
-                    <a:pt x="2936523" y="2627200"/>
-                  </a:lnTo>
-                  <a:lnTo>
-                    <a:pt x="2864901" y="2606722"/>
-                  </a:lnTo>
-                  <a:lnTo>
-                    <a:pt x="2793278" y="2585755"/>
-                  </a:lnTo>
-                  <a:lnTo>
-                    <a:pt x="2721655" y="2564286"/>
-                  </a:lnTo>
-                  <a:lnTo>
-                    <a:pt x="2650033" y="2542304"/>
-                  </a:lnTo>
-                  <a:lnTo>
-                    <a:pt x="2578410" y="2519797"/>
-                  </a:lnTo>
-                  <a:lnTo>
-                    <a:pt x="2506788" y="2496752"/>
-                  </a:lnTo>
-                  <a:lnTo>
-                    <a:pt x="2435165" y="2473155"/>
-                  </a:lnTo>
-                  <a:lnTo>
-                    <a:pt x="2363543" y="2448995"/>
-                  </a:lnTo>
-                  <a:lnTo>
-                    <a:pt x="2291920" y="2424257"/>
-                  </a:lnTo>
-                  <a:lnTo>
-                    <a:pt x="2220298" y="2398927"/>
-                  </a:lnTo>
-                  <a:lnTo>
-                    <a:pt x="2148675" y="2372992"/>
-                  </a:lnTo>
-                  <a:lnTo>
-                    <a:pt x="2077053" y="2346437"/>
-                  </a:lnTo>
-                  <a:lnTo>
-                    <a:pt x="2005430" y="2319247"/>
-                  </a:lnTo>
-                  <a:lnTo>
-                    <a:pt x="1933808" y="2291407"/>
-                  </a:lnTo>
-                  <a:lnTo>
-                    <a:pt x="1862185" y="2262901"/>
-                  </a:lnTo>
-                  <a:lnTo>
-                    <a:pt x="1790563" y="2233714"/>
-                  </a:lnTo>
-                  <a:lnTo>
-                    <a:pt x="1718940" y="2203829"/>
-                  </a:lnTo>
-                  <a:lnTo>
-                    <a:pt x="1647318" y="2173230"/>
-                  </a:lnTo>
-                  <a:lnTo>
-                    <a:pt x="1575695" y="2141899"/>
-                  </a:lnTo>
-                  <a:lnTo>
-                    <a:pt x="1504073" y="2109819"/>
-                  </a:lnTo>
-                  <a:lnTo>
-                    <a:pt x="1432450" y="2076973"/>
-                  </a:lnTo>
-                  <a:lnTo>
-                    <a:pt x="1360827" y="2043340"/>
-                  </a:lnTo>
-                  <a:lnTo>
-                    <a:pt x="1289205" y="2008904"/>
-                  </a:lnTo>
-                  <a:lnTo>
-                    <a:pt x="1217582" y="1973645"/>
-                  </a:lnTo>
-                  <a:lnTo>
-                    <a:pt x="1145960" y="1937542"/>
-                  </a:lnTo>
-                  <a:lnTo>
-                    <a:pt x="1074337" y="1900577"/>
-                  </a:lnTo>
-                  <a:lnTo>
-                    <a:pt x="1002715" y="1862728"/>
-                  </a:lnTo>
-                  <a:lnTo>
-                    <a:pt x="931092" y="1823973"/>
-                  </a:lnTo>
-                  <a:lnTo>
-                    <a:pt x="859470" y="1784293"/>
-                  </a:lnTo>
-                  <a:lnTo>
-                    <a:pt x="787847" y="1743664"/>
-                  </a:lnTo>
-                  <a:lnTo>
-                    <a:pt x="716225" y="1702063"/>
-                  </a:lnTo>
-                  <a:lnTo>
-                    <a:pt x="644602" y="1659468"/>
-                  </a:lnTo>
-                  <a:lnTo>
-                    <a:pt x="572980" y="1615854"/>
-                  </a:lnTo>
-                  <a:lnTo>
-                    <a:pt x="501357" y="1571198"/>
-                  </a:lnTo>
-                  <a:lnTo>
-                    <a:pt x="429735" y="1525474"/>
-                  </a:lnTo>
-                  <a:lnTo>
-                    <a:pt x="358112" y="1478657"/>
-                  </a:lnTo>
-                  <a:lnTo>
-                    <a:pt x="286490" y="1430721"/>
-                  </a:lnTo>
-                  <a:lnTo>
-                    <a:pt x="214867" y="1381639"/>
-                  </a:lnTo>
-                  <a:lnTo>
-                    <a:pt x="143245" y="1331383"/>
-                  </a:lnTo>
-                  <a:lnTo>
-                    <a:pt x="71622" y="1279926"/>
-                  </a:lnTo>
-                  <a:lnTo>
-                    <a:pt x="0" y="1227239"/>
+                    <a:pt x="1360827" y="2008"/>
+                  </a:lnTo>
+                  <a:lnTo>
+                    <a:pt x="1432450" y="209385"/>
+                  </a:lnTo>
+                  <a:lnTo>
+                    <a:pt x="1504073" y="404411"/>
+                  </a:lnTo>
+                  <a:lnTo>
+                    <a:pt x="1575695" y="587820"/>
+                  </a:lnTo>
+                  <a:lnTo>
+                    <a:pt x="1647318" y="760306"/>
+                  </a:lnTo>
+                  <a:lnTo>
+                    <a:pt x="1718940" y="922517"/>
+                  </a:lnTo>
+                  <a:lnTo>
+                    <a:pt x="1790563" y="1075068"/>
+                  </a:lnTo>
+                  <a:lnTo>
+                    <a:pt x="1862185" y="1218532"/>
+                  </a:lnTo>
+                  <a:lnTo>
+                    <a:pt x="1933808" y="1353451"/>
+                  </a:lnTo>
+                  <a:lnTo>
+                    <a:pt x="2005430" y="1480334"/>
+                  </a:lnTo>
+                  <a:lnTo>
+                    <a:pt x="2077053" y="1599660"/>
+                  </a:lnTo>
+                  <a:lnTo>
+                    <a:pt x="2148675" y="1711879"/>
+                  </a:lnTo>
+                  <a:lnTo>
+                    <a:pt x="2220298" y="1817414"/>
+                  </a:lnTo>
+                  <a:lnTo>
+                    <a:pt x="2291920" y="1916663"/>
+                  </a:lnTo>
+                  <a:lnTo>
+                    <a:pt x="2363543" y="2010001"/>
+                  </a:lnTo>
+                  <a:lnTo>
+                    <a:pt x="2435165" y="2097779"/>
+                  </a:lnTo>
+                  <a:lnTo>
+                    <a:pt x="2506788" y="2180329"/>
+                  </a:lnTo>
+                  <a:lnTo>
+                    <a:pt x="2578410" y="2257962"/>
+                  </a:lnTo>
+                  <a:lnTo>
+                    <a:pt x="2650033" y="2330972"/>
+                  </a:lnTo>
+                  <a:lnTo>
+                    <a:pt x="2721655" y="2399633"/>
+                  </a:lnTo>
+                  <a:lnTo>
+                    <a:pt x="2793278" y="2464204"/>
+                  </a:lnTo>
+                  <a:lnTo>
+                    <a:pt x="2864901" y="2524929"/>
+                  </a:lnTo>
+                  <a:lnTo>
+                    <a:pt x="2936523" y="2582038"/>
+                  </a:lnTo>
+                  <a:lnTo>
+                    <a:pt x="3008146" y="2635745"/>
+                  </a:lnTo>
+                  <a:lnTo>
+                    <a:pt x="3079768" y="2666837"/>
+                  </a:lnTo>
+                  <a:lnTo>
+                    <a:pt x="3151391" y="2686073"/>
+                  </a:lnTo>
+                  <a:lnTo>
+                    <a:pt x="3223013" y="2704855"/>
+                  </a:lnTo>
+                  <a:lnTo>
+                    <a:pt x="3294636" y="2723196"/>
+                  </a:lnTo>
+                  <a:lnTo>
+                    <a:pt x="3366258" y="2741104"/>
+                  </a:lnTo>
+                  <a:lnTo>
+                    <a:pt x="3437881" y="2758591"/>
+                  </a:lnTo>
+                  <a:lnTo>
+                    <a:pt x="3509503" y="2775666"/>
+                  </a:lnTo>
+                  <a:lnTo>
+                    <a:pt x="3581126" y="2792339"/>
+                  </a:lnTo>
+                  <a:lnTo>
+                    <a:pt x="3652748" y="2808619"/>
+                  </a:lnTo>
+                  <a:lnTo>
+                    <a:pt x="3724371" y="2824516"/>
+                  </a:lnTo>
+                  <a:lnTo>
+                    <a:pt x="3795993" y="2840039"/>
+                  </a:lnTo>
+                  <a:lnTo>
+                    <a:pt x="3867616" y="2855196"/>
+                  </a:lnTo>
+                  <a:lnTo>
+                    <a:pt x="3939238" y="2869996"/>
+                  </a:lnTo>
+                  <a:lnTo>
+                    <a:pt x="4010861" y="2884448"/>
+                  </a:lnTo>
+                  <a:lnTo>
+                    <a:pt x="4082483" y="2898559"/>
+                  </a:lnTo>
+                  <a:lnTo>
+                    <a:pt x="4154106" y="2912338"/>
+                  </a:lnTo>
+                  <a:lnTo>
+                    <a:pt x="4225729" y="2925793"/>
+                  </a:lnTo>
+                  <a:lnTo>
+                    <a:pt x="4297351" y="2938931"/>
+                  </a:lnTo>
+                  <a:lnTo>
+                    <a:pt x="4368974" y="2951760"/>
+                  </a:lnTo>
+                  <a:lnTo>
+                    <a:pt x="4440596" y="2964286"/>
+                  </a:lnTo>
+                  <a:lnTo>
+                    <a:pt x="4512219" y="2976518"/>
+                  </a:lnTo>
+                  <a:lnTo>
+                    <a:pt x="4583841" y="2988461"/>
+                  </a:lnTo>
+                  <a:lnTo>
+                    <a:pt x="4655464" y="3000124"/>
+                  </a:lnTo>
+                  <a:lnTo>
+                    <a:pt x="4727086" y="3011511"/>
+                  </a:lnTo>
+                  <a:lnTo>
+                    <a:pt x="4798709" y="3022631"/>
+                  </a:lnTo>
+                  <a:lnTo>
+                    <a:pt x="4870331" y="3033489"/>
+                  </a:lnTo>
+                  <a:lnTo>
+                    <a:pt x="4941954" y="3044091"/>
+                  </a:lnTo>
+                  <a:lnTo>
+                    <a:pt x="5013576" y="3054443"/>
+                  </a:lnTo>
+                  <a:lnTo>
+                    <a:pt x="5085199" y="3064552"/>
+                  </a:lnTo>
+                  <a:lnTo>
+                    <a:pt x="5156821" y="3074422"/>
+                  </a:lnTo>
+                  <a:lnTo>
+                    <a:pt x="5228444" y="3084060"/>
+                  </a:lnTo>
+                  <a:lnTo>
+                    <a:pt x="5300066" y="3093472"/>
+                  </a:lnTo>
+                  <a:lnTo>
+                    <a:pt x="5371689" y="3102661"/>
+                  </a:lnTo>
+                  <a:lnTo>
+                    <a:pt x="5443311" y="3111635"/>
+                  </a:lnTo>
+                  <a:lnTo>
+                    <a:pt x="5514934" y="3120397"/>
+                  </a:lnTo>
+                  <a:lnTo>
+                    <a:pt x="5586557" y="3128952"/>
+                  </a:lnTo>
+                  <a:lnTo>
+                    <a:pt x="5658179" y="3137306"/>
+                  </a:lnTo>
+                  <a:lnTo>
+                    <a:pt x="5729802" y="3145464"/>
+                  </a:lnTo>
+                  <a:lnTo>
+                    <a:pt x="5801424" y="3153429"/>
+                  </a:lnTo>
+                  <a:lnTo>
+                    <a:pt x="5873047" y="3161207"/>
+                  </a:lnTo>
+                  <a:lnTo>
+                    <a:pt x="5944669" y="3168802"/>
+                  </a:lnTo>
+                  <a:lnTo>
+                    <a:pt x="6016292" y="3176218"/>
+                  </a:lnTo>
+                  <a:lnTo>
+                    <a:pt x="6087914" y="3183459"/>
+                  </a:lnTo>
+                  <a:lnTo>
+                    <a:pt x="6159537" y="3190530"/>
+                  </a:lnTo>
+                  <a:lnTo>
+                    <a:pt x="6231159" y="3197434"/>
+                  </a:lnTo>
+                  <a:lnTo>
+                    <a:pt x="6302782" y="3204176"/>
+                  </a:lnTo>
+                  <a:lnTo>
+                    <a:pt x="6374404" y="3210759"/>
+                  </a:lnTo>
+                  <a:lnTo>
+                    <a:pt x="6446027" y="3217187"/>
+                  </a:lnTo>
+                  <a:lnTo>
+                    <a:pt x="6517649" y="3223463"/>
+                  </a:lnTo>
+                  <a:lnTo>
+                    <a:pt x="6589272" y="3229592"/>
+                  </a:lnTo>
+                  <a:lnTo>
+                    <a:pt x="6660894" y="3235577"/>
+                  </a:lnTo>
+                  <a:lnTo>
+                    <a:pt x="6732517" y="3241420"/>
+                  </a:lnTo>
+                  <a:lnTo>
+                    <a:pt x="6804139" y="3247126"/>
+                  </a:lnTo>
+                  <a:lnTo>
+                    <a:pt x="6875762" y="3252698"/>
+                  </a:lnTo>
+                  <a:lnTo>
+                    <a:pt x="6947385" y="3258138"/>
+                  </a:lnTo>
+                  <a:lnTo>
+                    <a:pt x="7019007" y="3263450"/>
+                  </a:lnTo>
+                  <a:lnTo>
+                    <a:pt x="7090630" y="3268638"/>
+                  </a:lnTo>
+                  <a:lnTo>
+                    <a:pt x="7090630" y="3458147"/>
+                  </a:lnTo>
+                  <a:lnTo>
+                    <a:pt x="7019007" y="3456525"/>
+                  </a:lnTo>
+                  <a:lnTo>
+                    <a:pt x="6947385" y="3454801"/>
+                  </a:lnTo>
+                  <a:lnTo>
+                    <a:pt x="6875762" y="3452968"/>
+                  </a:lnTo>
+                  <a:lnTo>
+                    <a:pt x="6804139" y="3451019"/>
+                  </a:lnTo>
+                  <a:lnTo>
+                    <a:pt x="6732517" y="3448946"/>
+                  </a:lnTo>
+                  <a:lnTo>
+                    <a:pt x="6660894" y="3446742"/>
+                  </a:lnTo>
+                  <a:lnTo>
+                    <a:pt x="6589272" y="3444399"/>
+                  </a:lnTo>
+                  <a:lnTo>
+                    <a:pt x="6517649" y="3441907"/>
+                  </a:lnTo>
+                  <a:lnTo>
+                    <a:pt x="6446027" y="3439257"/>
+                  </a:lnTo>
+                  <a:lnTo>
+                    <a:pt x="6374404" y="3436439"/>
+                  </a:lnTo>
+                  <a:lnTo>
+                    <a:pt x="6302782" y="3433443"/>
+                  </a:lnTo>
+                  <a:lnTo>
+                    <a:pt x="6231159" y="3430257"/>
+                  </a:lnTo>
+                  <a:lnTo>
+                    <a:pt x="6159537" y="3426869"/>
+                  </a:lnTo>
+                  <a:lnTo>
+                    <a:pt x="6087914" y="3423267"/>
+                  </a:lnTo>
+                  <a:lnTo>
+                    <a:pt x="6016292" y="3419437"/>
+                  </a:lnTo>
+                  <a:lnTo>
+                    <a:pt x="5944669" y="3415364"/>
+                  </a:lnTo>
+                  <a:lnTo>
+                    <a:pt x="5873047" y="3411033"/>
+                  </a:lnTo>
+                  <a:lnTo>
+                    <a:pt x="5801424" y="3406428"/>
+                  </a:lnTo>
+                  <a:lnTo>
+                    <a:pt x="5729802" y="3401531"/>
+                  </a:lnTo>
+                  <a:lnTo>
+                    <a:pt x="5658179" y="3396324"/>
+                  </a:lnTo>
+                  <a:lnTo>
+                    <a:pt x="5586557" y="3390787"/>
+                  </a:lnTo>
+                  <a:lnTo>
+                    <a:pt x="5514934" y="3384900"/>
+                  </a:lnTo>
+                  <a:lnTo>
+                    <a:pt x="5443311" y="3378639"/>
+                  </a:lnTo>
+                  <a:lnTo>
+                    <a:pt x="5371689" y="3371982"/>
+                  </a:lnTo>
+                  <a:lnTo>
+                    <a:pt x="5300066" y="3364904"/>
+                  </a:lnTo>
+                  <a:lnTo>
+                    <a:pt x="5228444" y="3357377"/>
+                  </a:lnTo>
+                  <a:lnTo>
+                    <a:pt x="5156821" y="3349374"/>
+                  </a:lnTo>
+                  <a:lnTo>
+                    <a:pt x="5085199" y="3340864"/>
+                  </a:lnTo>
+                  <a:lnTo>
+                    <a:pt x="5013576" y="3331814"/>
+                  </a:lnTo>
+                  <a:lnTo>
+                    <a:pt x="4941954" y="3322192"/>
+                  </a:lnTo>
+                  <a:lnTo>
+                    <a:pt x="4870331" y="3311960"/>
+                  </a:lnTo>
+                  <a:lnTo>
+                    <a:pt x="4798709" y="3301080"/>
+                  </a:lnTo>
+                  <a:lnTo>
+                    <a:pt x="4727086" y="3289511"/>
+                  </a:lnTo>
+                  <a:lnTo>
+                    <a:pt x="4655464" y="3277210"/>
+                  </a:lnTo>
+                  <a:lnTo>
+                    <a:pt x="4583841" y="3264129"/>
+                  </a:lnTo>
+                  <a:lnTo>
+                    <a:pt x="4512219" y="3250220"/>
+                  </a:lnTo>
+                  <a:lnTo>
+                    <a:pt x="4440596" y="3235430"/>
+                  </a:lnTo>
+                  <a:lnTo>
+                    <a:pt x="4368974" y="3219703"/>
+                  </a:lnTo>
+                  <a:lnTo>
+                    <a:pt x="4297351" y="3202980"/>
+                  </a:lnTo>
+                  <a:lnTo>
+                    <a:pt x="4225729" y="3185198"/>
+                  </a:lnTo>
+                  <a:lnTo>
+                    <a:pt x="4154106" y="3166290"/>
+                  </a:lnTo>
+                  <a:lnTo>
+                    <a:pt x="4082483" y="3146184"/>
+                  </a:lnTo>
+                  <a:lnTo>
+                    <a:pt x="4010861" y="3124805"/>
+                  </a:lnTo>
+                  <a:lnTo>
+                    <a:pt x="3939238" y="3102072"/>
+                  </a:lnTo>
+                  <a:lnTo>
+                    <a:pt x="3867616" y="3077899"/>
+                  </a:lnTo>
+                  <a:lnTo>
+                    <a:pt x="3795993" y="3052196"/>
+                  </a:lnTo>
+                  <a:lnTo>
+                    <a:pt x="3724371" y="3024864"/>
+                  </a:lnTo>
+                  <a:lnTo>
+                    <a:pt x="3652748" y="2995801"/>
+                  </a:lnTo>
+                  <a:lnTo>
+                    <a:pt x="3581126" y="2964898"/>
+                  </a:lnTo>
+                  <a:lnTo>
+                    <a:pt x="3509503" y="2932037"/>
+                  </a:lnTo>
+                  <a:lnTo>
+                    <a:pt x="3437881" y="2897096"/>
+                  </a:lnTo>
+                  <a:lnTo>
+                    <a:pt x="3366258" y="2859941"/>
+                  </a:lnTo>
+                  <a:lnTo>
+                    <a:pt x="3294636" y="2820433"/>
+                  </a:lnTo>
+                  <a:lnTo>
+                    <a:pt x="3223013" y="2778423"/>
+                  </a:lnTo>
+                  <a:lnTo>
+                    <a:pt x="3151391" y="2733753"/>
+                  </a:lnTo>
+                  <a:lnTo>
+                    <a:pt x="3079768" y="2686253"/>
+                  </a:lnTo>
+                  <a:lnTo>
+                    <a:pt x="3008146" y="2647138"/>
+                  </a:lnTo>
+                  <a:lnTo>
+                    <a:pt x="2936523" y="2626964"/>
+                  </a:lnTo>
+                  <a:lnTo>
+                    <a:pt x="2864901" y="2606303"/>
+                  </a:lnTo>
+                  <a:lnTo>
+                    <a:pt x="2793278" y="2585144"/>
+                  </a:lnTo>
+                  <a:lnTo>
+                    <a:pt x="2721655" y="2563475"/>
+                  </a:lnTo>
+                  <a:lnTo>
+                    <a:pt x="2650033" y="2541283"/>
+                  </a:lnTo>
+                  <a:lnTo>
+                    <a:pt x="2578410" y="2518556"/>
+                  </a:lnTo>
+                  <a:lnTo>
+                    <a:pt x="2506788" y="2495281"/>
+                  </a:lnTo>
+                  <a:lnTo>
+                    <a:pt x="2435165" y="2471444"/>
+                  </a:lnTo>
+                  <a:lnTo>
+                    <a:pt x="2363543" y="2447033"/>
+                  </a:lnTo>
+                  <a:lnTo>
+                    <a:pt x="2291920" y="2422034"/>
+                  </a:lnTo>
+                  <a:lnTo>
+                    <a:pt x="2220298" y="2396431"/>
+                  </a:lnTo>
+                  <a:lnTo>
+                    <a:pt x="2148675" y="2370211"/>
+                  </a:lnTo>
+                  <a:lnTo>
+                    <a:pt x="2077053" y="2343359"/>
+                  </a:lnTo>
+                  <a:lnTo>
+                    <a:pt x="2005430" y="2315859"/>
+                  </a:lnTo>
+                  <a:lnTo>
+                    <a:pt x="1933808" y="2287696"/>
+                  </a:lnTo>
+                  <a:lnTo>
+                    <a:pt x="1862185" y="2258854"/>
+                  </a:lnTo>
+                  <a:lnTo>
+                    <a:pt x="1790563" y="2229316"/>
+                  </a:lnTo>
+                  <a:lnTo>
+                    <a:pt x="1718940" y="2199066"/>
+                  </a:lnTo>
+                  <a:lnTo>
+                    <a:pt x="1647318" y="2168087"/>
+                  </a:lnTo>
+                  <a:lnTo>
+                    <a:pt x="1575695" y="2136361"/>
+                  </a:lnTo>
+                  <a:lnTo>
+                    <a:pt x="1504073" y="2103869"/>
+                  </a:lnTo>
+                  <a:lnTo>
+                    <a:pt x="1432450" y="2070594"/>
+                  </a:lnTo>
+                  <a:lnTo>
+                    <a:pt x="1360827" y="2036517"/>
+                  </a:lnTo>
+                  <a:lnTo>
+                    <a:pt x="1289205" y="2001618"/>
+                  </a:lnTo>
+                  <a:lnTo>
+                    <a:pt x="1217582" y="1965877"/>
+                  </a:lnTo>
+                  <a:lnTo>
+                    <a:pt x="1145960" y="1929274"/>
+                  </a:lnTo>
+                  <a:lnTo>
+                    <a:pt x="1074337" y="1891789"/>
+                  </a:lnTo>
+                  <a:lnTo>
+                    <a:pt x="1002715" y="1853400"/>
+                  </a:lnTo>
+                  <a:lnTo>
+                    <a:pt x="931092" y="1814085"/>
+                  </a:lnTo>
+                  <a:lnTo>
+                    <a:pt x="859470" y="1773822"/>
+                  </a:lnTo>
+                  <a:lnTo>
+                    <a:pt x="787847" y="1732588"/>
+                  </a:lnTo>
+                  <a:lnTo>
+                    <a:pt x="716225" y="1690360"/>
+                  </a:lnTo>
+                  <a:lnTo>
+                    <a:pt x="644602" y="1647113"/>
+                  </a:lnTo>
+                  <a:lnTo>
+                    <a:pt x="572980" y="1602824"/>
+                  </a:lnTo>
+                  <a:lnTo>
+                    <a:pt x="501357" y="1557467"/>
+                  </a:lnTo>
+                  <a:lnTo>
+                    <a:pt x="429735" y="1511015"/>
+                  </a:lnTo>
+                  <a:lnTo>
+                    <a:pt x="358112" y="1463444"/>
+                  </a:lnTo>
+                  <a:lnTo>
+                    <a:pt x="286490" y="1414726"/>
+                  </a:lnTo>
+                  <a:lnTo>
+                    <a:pt x="214867" y="1364832"/>
+                  </a:lnTo>
+                  <a:lnTo>
+                    <a:pt x="143245" y="1313736"/>
+                  </a:lnTo>
+                  <a:lnTo>
+                    <a:pt x="71622" y="1261407"/>
+                  </a:lnTo>
+                  <a:lnTo>
+                    <a:pt x="0" y="1207817"/>
                   </a:lnTo>
                   <a:close/>
                 </a:path>
@@ -3966,258 +3966,258 @@
           </p:nvSpPr>
           <p:spPr>
             <a:xfrm>
-              <a:off x="2528073" y="2073503"/>
-              <a:ext cx="5734605" cy="3266158"/>
+              <a:off x="2532224" y="2073503"/>
+              <a:ext cx="5730454" cy="3268638"/>
             </a:xfrm>
             <a:custGeom>
               <a:avLst/>
               <a:pathLst>
-                <a:path w="5734605" h="3266158">
+                <a:path w="5730454" h="3268638">
                   <a:moveTo>
                     <a:pt x="0" y="0"/>
                   </a:moveTo>
                   <a:lnTo>
-                    <a:pt x="4803" y="14697"/>
-                  </a:lnTo>
-                  <a:lnTo>
-                    <a:pt x="76426" y="220808"/>
-                  </a:lnTo>
-                  <a:lnTo>
-                    <a:pt x="148048" y="414674"/>
-                  </a:lnTo>
-                  <a:lnTo>
-                    <a:pt x="219671" y="597021"/>
-                  </a:lnTo>
-                  <a:lnTo>
-                    <a:pt x="291293" y="768534"/>
-                  </a:lnTo>
-                  <a:lnTo>
-                    <a:pt x="362916" y="929856"/>
-                  </a:lnTo>
-                  <a:lnTo>
-                    <a:pt x="434539" y="1081594"/>
-                  </a:lnTo>
-                  <a:lnTo>
-                    <a:pt x="506161" y="1224317"/>
-                  </a:lnTo>
-                  <a:lnTo>
-                    <a:pt x="577784" y="1358559"/>
-                  </a:lnTo>
-                  <a:lnTo>
-                    <a:pt x="649406" y="1484826"/>
-                  </a:lnTo>
-                  <a:lnTo>
-                    <a:pt x="721029" y="1603590"/>
-                  </a:lnTo>
-                  <a:lnTo>
-                    <a:pt x="792651" y="1715299"/>
-                  </a:lnTo>
-                  <a:lnTo>
-                    <a:pt x="864274" y="1820370"/>
-                  </a:lnTo>
-                  <a:lnTo>
-                    <a:pt x="935896" y="1919198"/>
-                  </a:lnTo>
-                  <a:lnTo>
-                    <a:pt x="1007519" y="2012155"/>
-                  </a:lnTo>
-                  <a:lnTo>
-                    <a:pt x="1079141" y="2099589"/>
-                  </a:lnTo>
-                  <a:lnTo>
-                    <a:pt x="1150764" y="2181827"/>
-                  </a:lnTo>
-                  <a:lnTo>
-                    <a:pt x="1222386" y="2259180"/>
-                  </a:lnTo>
-                  <a:lnTo>
-                    <a:pt x="1294009" y="2331937"/>
-                  </a:lnTo>
-                  <a:lnTo>
-                    <a:pt x="1365631" y="2400371"/>
-                  </a:lnTo>
-                  <a:lnTo>
-                    <a:pt x="1437254" y="2464739"/>
-                  </a:lnTo>
-                  <a:lnTo>
-                    <a:pt x="1508876" y="2525283"/>
-                  </a:lnTo>
-                  <a:lnTo>
-                    <a:pt x="1580499" y="2582229"/>
-                  </a:lnTo>
-                  <a:lnTo>
-                    <a:pt x="1652121" y="2635792"/>
-                  </a:lnTo>
-                  <a:lnTo>
-                    <a:pt x="1723744" y="2666732"/>
-                  </a:lnTo>
-                  <a:lnTo>
-                    <a:pt x="1795367" y="2685808"/>
-                  </a:lnTo>
-                  <a:lnTo>
-                    <a:pt x="1866989" y="2704439"/>
-                  </a:lnTo>
-                  <a:lnTo>
-                    <a:pt x="1938612" y="2722635"/>
-                  </a:lnTo>
-                  <a:lnTo>
-                    <a:pt x="2010234" y="2740407"/>
-                  </a:lnTo>
-                  <a:lnTo>
-                    <a:pt x="2081857" y="2757763"/>
-                  </a:lnTo>
-                  <a:lnTo>
-                    <a:pt x="2153479" y="2774714"/>
-                  </a:lnTo>
-                  <a:lnTo>
-                    <a:pt x="2225102" y="2791269"/>
-                  </a:lnTo>
-                  <a:lnTo>
-                    <a:pt x="2296724" y="2807438"/>
-                  </a:lnTo>
-                  <a:lnTo>
-                    <a:pt x="2368347" y="2823229"/>
-                  </a:lnTo>
-                  <a:lnTo>
-                    <a:pt x="2439969" y="2838651"/>
-                  </a:lnTo>
-                  <a:lnTo>
-                    <a:pt x="2511592" y="2853714"/>
-                  </a:lnTo>
-                  <a:lnTo>
-                    <a:pt x="2583214" y="2868424"/>
-                  </a:lnTo>
-                  <a:lnTo>
-                    <a:pt x="2654837" y="2882792"/>
-                  </a:lnTo>
-                  <a:lnTo>
-                    <a:pt x="2726459" y="2896823"/>
-                  </a:lnTo>
-                  <a:lnTo>
-                    <a:pt x="2798082" y="2910528"/>
-                  </a:lnTo>
-                  <a:lnTo>
-                    <a:pt x="2869704" y="2923912"/>
-                  </a:lnTo>
-                  <a:lnTo>
-                    <a:pt x="2941327" y="2936983"/>
-                  </a:lnTo>
-                  <a:lnTo>
-                    <a:pt x="3012949" y="2949750"/>
-                  </a:lnTo>
-                  <a:lnTo>
-                    <a:pt x="3084572" y="2962218"/>
-                  </a:lnTo>
-                  <a:lnTo>
-                    <a:pt x="3156195" y="2974395"/>
-                  </a:lnTo>
-                  <a:lnTo>
-                    <a:pt x="3227817" y="2986288"/>
-                  </a:lnTo>
-                  <a:lnTo>
-                    <a:pt x="3299440" y="2997903"/>
-                  </a:lnTo>
-                  <a:lnTo>
-                    <a:pt x="3371062" y="3009247"/>
-                  </a:lnTo>
-                  <a:lnTo>
-                    <a:pt x="3442685" y="3020326"/>
-                  </a:lnTo>
-                  <a:lnTo>
-                    <a:pt x="3514307" y="3031147"/>
-                  </a:lnTo>
-                  <a:lnTo>
-                    <a:pt x="3585930" y="3041715"/>
-                  </a:lnTo>
-                  <a:lnTo>
-                    <a:pt x="3657552" y="3052036"/>
-                  </a:lnTo>
-                  <a:lnTo>
-                    <a:pt x="3729175" y="3062116"/>
-                  </a:lnTo>
-                  <a:lnTo>
-                    <a:pt x="3800797" y="3071960"/>
-                  </a:lnTo>
-                  <a:lnTo>
-                    <a:pt x="3872420" y="3081575"/>
-                  </a:lnTo>
-                  <a:lnTo>
-                    <a:pt x="3944042" y="3090965"/>
-                  </a:lnTo>
-                  <a:lnTo>
-                    <a:pt x="4015665" y="3100136"/>
-                  </a:lnTo>
-                  <a:lnTo>
-                    <a:pt x="4087287" y="3109093"/>
-                  </a:lnTo>
-                  <a:lnTo>
-                    <a:pt x="4158910" y="3117841"/>
-                  </a:lnTo>
-                  <a:lnTo>
-                    <a:pt x="4230532" y="3126385"/>
-                  </a:lnTo>
-                  <a:lnTo>
-                    <a:pt x="4302155" y="3134729"/>
-                  </a:lnTo>
-                  <a:lnTo>
-                    <a:pt x="4373777" y="3142878"/>
-                  </a:lnTo>
-                  <a:lnTo>
-                    <a:pt x="4445400" y="3150837"/>
-                  </a:lnTo>
-                  <a:lnTo>
-                    <a:pt x="4517022" y="3158610"/>
-                  </a:lnTo>
-                  <a:lnTo>
-                    <a:pt x="4588645" y="3166202"/>
-                  </a:lnTo>
-                  <a:lnTo>
-                    <a:pt x="4660268" y="3173616"/>
-                  </a:lnTo>
-                  <a:lnTo>
-                    <a:pt x="4731890" y="3180857"/>
-                  </a:lnTo>
-                  <a:lnTo>
-                    <a:pt x="4803513" y="3187930"/>
-                  </a:lnTo>
-                  <a:lnTo>
-                    <a:pt x="4875135" y="3194837"/>
-                  </a:lnTo>
-                  <a:lnTo>
-                    <a:pt x="4946758" y="3201582"/>
-                  </a:lnTo>
-                  <a:lnTo>
-                    <a:pt x="5018380" y="3208171"/>
-                  </a:lnTo>
-                  <a:lnTo>
-                    <a:pt x="5090003" y="3214605"/>
-                  </a:lnTo>
-                  <a:lnTo>
-                    <a:pt x="5161625" y="3220889"/>
-                  </a:lnTo>
-                  <a:lnTo>
-                    <a:pt x="5233248" y="3227027"/>
-                  </a:lnTo>
-                  <a:lnTo>
-                    <a:pt x="5304870" y="3233021"/>
-                  </a:lnTo>
-                  <a:lnTo>
-                    <a:pt x="5376493" y="3238875"/>
-                  </a:lnTo>
-                  <a:lnTo>
-                    <a:pt x="5448115" y="3244593"/>
-                  </a:lnTo>
-                  <a:lnTo>
-                    <a:pt x="5519738" y="3250177"/>
-                  </a:lnTo>
-                  <a:lnTo>
-                    <a:pt x="5591360" y="3255630"/>
-                  </a:lnTo>
-                  <a:lnTo>
-                    <a:pt x="5662983" y="3260957"/>
-                  </a:lnTo>
-                  <a:lnTo>
-                    <a:pt x="5734605" y="3266158"/>
+                    <a:pt x="652" y="2008"/>
+                  </a:lnTo>
+                  <a:lnTo>
+                    <a:pt x="72275" y="209385"/>
+                  </a:lnTo>
+                  <a:lnTo>
+                    <a:pt x="143897" y="404411"/>
+                  </a:lnTo>
+                  <a:lnTo>
+                    <a:pt x="215520" y="587820"/>
+                  </a:lnTo>
+                  <a:lnTo>
+                    <a:pt x="287142" y="760306"/>
+                  </a:lnTo>
+                  <a:lnTo>
+                    <a:pt x="358765" y="922517"/>
+                  </a:lnTo>
+                  <a:lnTo>
+                    <a:pt x="430387" y="1075068"/>
+                  </a:lnTo>
+                  <a:lnTo>
+                    <a:pt x="502010" y="1218532"/>
+                  </a:lnTo>
+                  <a:lnTo>
+                    <a:pt x="573632" y="1353451"/>
+                  </a:lnTo>
+                  <a:lnTo>
+                    <a:pt x="645255" y="1480334"/>
+                  </a:lnTo>
+                  <a:lnTo>
+                    <a:pt x="716877" y="1599660"/>
+                  </a:lnTo>
+                  <a:lnTo>
+                    <a:pt x="788500" y="1711879"/>
+                  </a:lnTo>
+                  <a:lnTo>
+                    <a:pt x="860122" y="1817414"/>
+                  </a:lnTo>
+                  <a:lnTo>
+                    <a:pt x="931745" y="1916663"/>
+                  </a:lnTo>
+                  <a:lnTo>
+                    <a:pt x="1003367" y="2010001"/>
+                  </a:lnTo>
+                  <a:lnTo>
+                    <a:pt x="1074990" y="2097779"/>
+                  </a:lnTo>
+                  <a:lnTo>
+                    <a:pt x="1146612" y="2180329"/>
+                  </a:lnTo>
+                  <a:lnTo>
+                    <a:pt x="1218235" y="2257962"/>
+                  </a:lnTo>
+                  <a:lnTo>
+                    <a:pt x="1289857" y="2330972"/>
+                  </a:lnTo>
+                  <a:lnTo>
+                    <a:pt x="1361480" y="2399633"/>
+                  </a:lnTo>
+                  <a:lnTo>
+                    <a:pt x="1433103" y="2464204"/>
+                  </a:lnTo>
+                  <a:lnTo>
+                    <a:pt x="1504725" y="2524929"/>
+                  </a:lnTo>
+                  <a:lnTo>
+                    <a:pt x="1576348" y="2582038"/>
+                  </a:lnTo>
+                  <a:lnTo>
+                    <a:pt x="1647970" y="2635745"/>
+                  </a:lnTo>
+                  <a:lnTo>
+                    <a:pt x="1719593" y="2666837"/>
+                  </a:lnTo>
+                  <a:lnTo>
+                    <a:pt x="1791215" y="2686073"/>
+                  </a:lnTo>
+                  <a:lnTo>
+                    <a:pt x="1862838" y="2704855"/>
+                  </a:lnTo>
+                  <a:lnTo>
+                    <a:pt x="1934460" y="2723196"/>
+                  </a:lnTo>
+                  <a:lnTo>
+                    <a:pt x="2006083" y="2741104"/>
+                  </a:lnTo>
+                  <a:lnTo>
+                    <a:pt x="2077705" y="2758591"/>
+                  </a:lnTo>
+                  <a:lnTo>
+                    <a:pt x="2149328" y="2775666"/>
+                  </a:lnTo>
+                  <a:lnTo>
+                    <a:pt x="2220950" y="2792339"/>
+                  </a:lnTo>
+                  <a:lnTo>
+                    <a:pt x="2292573" y="2808619"/>
+                  </a:lnTo>
+                  <a:lnTo>
+                    <a:pt x="2364195" y="2824516"/>
+                  </a:lnTo>
+                  <a:lnTo>
+                    <a:pt x="2435818" y="2840039"/>
+                  </a:lnTo>
+                  <a:lnTo>
+                    <a:pt x="2507440" y="2855196"/>
+                  </a:lnTo>
+                  <a:lnTo>
+                    <a:pt x="2579063" y="2869996"/>
+                  </a:lnTo>
+                  <a:lnTo>
+                    <a:pt x="2650685" y="2884448"/>
+                  </a:lnTo>
+                  <a:lnTo>
+                    <a:pt x="2722308" y="2898559"/>
+                  </a:lnTo>
+                  <a:lnTo>
+                    <a:pt x="2793931" y="2912338"/>
+                  </a:lnTo>
+                  <a:lnTo>
+                    <a:pt x="2865553" y="2925793"/>
+                  </a:lnTo>
+                  <a:lnTo>
+                    <a:pt x="2937176" y="2938931"/>
+                  </a:lnTo>
+                  <a:lnTo>
+                    <a:pt x="3008798" y="2951760"/>
+                  </a:lnTo>
+                  <a:lnTo>
+                    <a:pt x="3080421" y="2964286"/>
+                  </a:lnTo>
+                  <a:lnTo>
+                    <a:pt x="3152043" y="2976518"/>
+                  </a:lnTo>
+                  <a:lnTo>
+                    <a:pt x="3223666" y="2988461"/>
+                  </a:lnTo>
+                  <a:lnTo>
+                    <a:pt x="3295288" y="3000124"/>
+                  </a:lnTo>
+                  <a:lnTo>
+                    <a:pt x="3366911" y="3011511"/>
+                  </a:lnTo>
+                  <a:lnTo>
+                    <a:pt x="3438533" y="3022631"/>
+                  </a:lnTo>
+                  <a:lnTo>
+                    <a:pt x="3510156" y="3033489"/>
+                  </a:lnTo>
+                  <a:lnTo>
+                    <a:pt x="3581778" y="3044091"/>
+                  </a:lnTo>
+                  <a:lnTo>
+                    <a:pt x="3653401" y="3054443"/>
+                  </a:lnTo>
+                  <a:lnTo>
+                    <a:pt x="3725023" y="3064552"/>
+                  </a:lnTo>
+                  <a:lnTo>
+                    <a:pt x="3796646" y="3074422"/>
+                  </a:lnTo>
+                  <a:lnTo>
+                    <a:pt x="3868268" y="3084060"/>
+                  </a:lnTo>
+                  <a:lnTo>
+                    <a:pt x="3939891" y="3093472"/>
+                  </a:lnTo>
+                  <a:lnTo>
+                    <a:pt x="4011513" y="3102661"/>
+                  </a:lnTo>
+                  <a:lnTo>
+                    <a:pt x="4083136" y="3111635"/>
+                  </a:lnTo>
+                  <a:lnTo>
+                    <a:pt x="4154759" y="3120397"/>
+                  </a:lnTo>
+                  <a:lnTo>
+                    <a:pt x="4226381" y="3128952"/>
+                  </a:lnTo>
+                  <a:lnTo>
+                    <a:pt x="4298004" y="3137306"/>
+                  </a:lnTo>
+                  <a:lnTo>
+                    <a:pt x="4369626" y="3145464"/>
+                  </a:lnTo>
+                  <a:lnTo>
+                    <a:pt x="4441249" y="3153429"/>
+                  </a:lnTo>
+                  <a:lnTo>
+                    <a:pt x="4512871" y="3161207"/>
+                  </a:lnTo>
+                  <a:lnTo>
+                    <a:pt x="4584494" y="3168802"/>
+                  </a:lnTo>
+                  <a:lnTo>
+                    <a:pt x="4656116" y="3176218"/>
+                  </a:lnTo>
+                  <a:lnTo>
+                    <a:pt x="4727739" y="3183459"/>
+                  </a:lnTo>
+                  <a:lnTo>
+                    <a:pt x="4799361" y="3190530"/>
+                  </a:lnTo>
+                  <a:lnTo>
+                    <a:pt x="4870984" y="3197434"/>
+                  </a:lnTo>
+                  <a:lnTo>
+                    <a:pt x="4942606" y="3204176"/>
+                  </a:lnTo>
+                  <a:lnTo>
+                    <a:pt x="5014229" y="3210759"/>
+                  </a:lnTo>
+                  <a:lnTo>
+                    <a:pt x="5085851" y="3217187"/>
+                  </a:lnTo>
+                  <a:lnTo>
+                    <a:pt x="5157474" y="3223463"/>
+                  </a:lnTo>
+                  <a:lnTo>
+                    <a:pt x="5229096" y="3229592"/>
+                  </a:lnTo>
+                  <a:lnTo>
+                    <a:pt x="5300719" y="3235577"/>
+                  </a:lnTo>
+                  <a:lnTo>
+                    <a:pt x="5372341" y="3241420"/>
+                  </a:lnTo>
+                  <a:lnTo>
+                    <a:pt x="5443964" y="3247126"/>
+                  </a:lnTo>
+                  <a:lnTo>
+                    <a:pt x="5515587" y="3252698"/>
+                  </a:lnTo>
+                  <a:lnTo>
+                    <a:pt x="5587209" y="3258138"/>
+                  </a:lnTo>
+                  <a:lnTo>
+                    <a:pt x="5658832" y="3263450"/>
+                  </a:lnTo>
+                  <a:lnTo>
+                    <a:pt x="5730454" y="3268638"/>
                   </a:lnTo>
                 </a:path>
               </a:pathLst>
@@ -4237,309 +4237,309 @@
           </p:nvSpPr>
           <p:spPr>
             <a:xfrm>
-              <a:off x="1172049" y="3300742"/>
-              <a:ext cx="7090630" cy="2230680"/>
+              <a:off x="1172049" y="3281320"/>
+              <a:ext cx="7090630" cy="2250330"/>
             </a:xfrm>
             <a:custGeom>
               <a:avLst/>
               <a:pathLst>
-                <a:path w="7090630" h="2230680">
+                <a:path w="7090630" h="2250330">
                   <a:moveTo>
-                    <a:pt x="7090630" y="2230680"/>
+                    <a:pt x="7090630" y="2250330"/>
                   </a:moveTo>
                   <a:lnTo>
-                    <a:pt x="7019007" y="2229049"/>
-                  </a:lnTo>
-                  <a:lnTo>
-                    <a:pt x="6947385" y="2227314"/>
-                  </a:lnTo>
-                  <a:lnTo>
-                    <a:pt x="6875762" y="2225470"/>
-                  </a:lnTo>
-                  <a:lnTo>
-                    <a:pt x="6804139" y="2223509"/>
-                  </a:lnTo>
-                  <a:lnTo>
-                    <a:pt x="6732517" y="2221425"/>
-                  </a:lnTo>
-                  <a:lnTo>
-                    <a:pt x="6660894" y="2219209"/>
-                  </a:lnTo>
-                  <a:lnTo>
-                    <a:pt x="6589272" y="2216853"/>
-                  </a:lnTo>
-                  <a:lnTo>
-                    <a:pt x="6517649" y="2214348"/>
-                  </a:lnTo>
-                  <a:lnTo>
-                    <a:pt x="6446027" y="2211685"/>
-                  </a:lnTo>
-                  <a:lnTo>
-                    <a:pt x="6374404" y="2208854"/>
-                  </a:lnTo>
-                  <a:lnTo>
-                    <a:pt x="6302782" y="2205844"/>
-                  </a:lnTo>
-                  <a:lnTo>
-                    <a:pt x="6231159" y="2202643"/>
-                  </a:lnTo>
-                  <a:lnTo>
-                    <a:pt x="6159537" y="2199241"/>
-                  </a:lnTo>
-                  <a:lnTo>
-                    <a:pt x="6087914" y="2195624"/>
-                  </a:lnTo>
-                  <a:lnTo>
-                    <a:pt x="6016292" y="2191778"/>
-                  </a:lnTo>
-                  <a:lnTo>
-                    <a:pt x="5944669" y="2187689"/>
-                  </a:lnTo>
-                  <a:lnTo>
-                    <a:pt x="5873047" y="2183342"/>
-                  </a:lnTo>
-                  <a:lnTo>
-                    <a:pt x="5801424" y="2178720"/>
-                  </a:lnTo>
-                  <a:lnTo>
-                    <a:pt x="5729802" y="2173807"/>
-                  </a:lnTo>
-                  <a:lnTo>
-                    <a:pt x="5658179" y="2168583"/>
-                  </a:lnTo>
-                  <a:lnTo>
-                    <a:pt x="5586557" y="2163029"/>
-                  </a:lnTo>
-                  <a:lnTo>
-                    <a:pt x="5514934" y="2157124"/>
-                  </a:lnTo>
-                  <a:lnTo>
-                    <a:pt x="5443311" y="2150846"/>
-                  </a:lnTo>
-                  <a:lnTo>
-                    <a:pt x="5371689" y="2144172"/>
-                  </a:lnTo>
-                  <a:lnTo>
-                    <a:pt x="5300066" y="2137076"/>
-                  </a:lnTo>
-                  <a:lnTo>
-                    <a:pt x="5228444" y="2129531"/>
-                  </a:lnTo>
-                  <a:lnTo>
-                    <a:pt x="5156821" y="2121511"/>
-                  </a:lnTo>
-                  <a:lnTo>
-                    <a:pt x="5085199" y="2112983"/>
-                  </a:lnTo>
-                  <a:lnTo>
-                    <a:pt x="5013576" y="2103917"/>
-                  </a:lnTo>
-                  <a:lnTo>
-                    <a:pt x="4941954" y="2094279"/>
-                  </a:lnTo>
-                  <a:lnTo>
-                    <a:pt x="4870331" y="2084031"/>
-                  </a:lnTo>
-                  <a:lnTo>
-                    <a:pt x="4798709" y="2073136"/>
-                  </a:lnTo>
-                  <a:lnTo>
-                    <a:pt x="4727086" y="2061553"/>
-                  </a:lnTo>
-                  <a:lnTo>
-                    <a:pt x="4655464" y="2049238"/>
-                  </a:lnTo>
-                  <a:lnTo>
-                    <a:pt x="4583841" y="2036146"/>
-                  </a:lnTo>
-                  <a:lnTo>
-                    <a:pt x="4512219" y="2022226"/>
-                  </a:lnTo>
-                  <a:lnTo>
-                    <a:pt x="4440596" y="2007427"/>
-                  </a:lnTo>
-                  <a:lnTo>
-                    <a:pt x="4368974" y="1991693"/>
-                  </a:lnTo>
-                  <a:lnTo>
-                    <a:pt x="4297351" y="1974966"/>
-                  </a:lnTo>
-                  <a:lnTo>
-                    <a:pt x="4225729" y="1957181"/>
-                  </a:lnTo>
-                  <a:lnTo>
-                    <a:pt x="4154106" y="1938274"/>
-                  </a:lnTo>
-                  <a:lnTo>
-                    <a:pt x="4082483" y="1918172"/>
-                  </a:lnTo>
-                  <a:lnTo>
-                    <a:pt x="4010861" y="1896800"/>
-                  </a:lnTo>
-                  <a:lnTo>
-                    <a:pt x="3939238" y="1874078"/>
-                  </a:lnTo>
-                  <a:lnTo>
-                    <a:pt x="3867616" y="1849921"/>
-                  </a:lnTo>
-                  <a:lnTo>
-                    <a:pt x="3795993" y="1824238"/>
-                  </a:lnTo>
-                  <a:lnTo>
-                    <a:pt x="3724371" y="1796933"/>
-                  </a:lnTo>
-                  <a:lnTo>
-                    <a:pt x="3652748" y="1767903"/>
-                  </a:lnTo>
-                  <a:lnTo>
-                    <a:pt x="3581126" y="1737039"/>
-                  </a:lnTo>
-                  <a:lnTo>
-                    <a:pt x="3509503" y="1704225"/>
-                  </a:lnTo>
-                  <a:lnTo>
-                    <a:pt x="3437881" y="1669339"/>
-                  </a:lnTo>
-                  <a:lnTo>
-                    <a:pt x="3366258" y="1632249"/>
-                  </a:lnTo>
-                  <a:lnTo>
-                    <a:pt x="3294636" y="1592817"/>
-                  </a:lnTo>
-                  <a:lnTo>
-                    <a:pt x="3223013" y="1550893"/>
-                  </a:lnTo>
-                  <a:lnTo>
-                    <a:pt x="3151391" y="1506321"/>
-                  </a:lnTo>
-                  <a:lnTo>
-                    <a:pt x="3079768" y="1458934"/>
-                  </a:lnTo>
-                  <a:lnTo>
-                    <a:pt x="3008146" y="1419960"/>
-                  </a:lnTo>
-                  <a:lnTo>
-                    <a:pt x="2936523" y="1399960"/>
-                  </a:lnTo>
-                  <a:lnTo>
-                    <a:pt x="2864901" y="1379483"/>
-                  </a:lnTo>
-                  <a:lnTo>
-                    <a:pt x="2793278" y="1358515"/>
-                  </a:lnTo>
-                  <a:lnTo>
-                    <a:pt x="2721655" y="1337047"/>
-                  </a:lnTo>
-                  <a:lnTo>
-                    <a:pt x="2650033" y="1315065"/>
-                  </a:lnTo>
-                  <a:lnTo>
-                    <a:pt x="2578410" y="1292558"/>
-                  </a:lnTo>
-                  <a:lnTo>
-                    <a:pt x="2506788" y="1269512"/>
-                  </a:lnTo>
-                  <a:lnTo>
-                    <a:pt x="2435165" y="1245916"/>
-                  </a:lnTo>
-                  <a:lnTo>
-                    <a:pt x="2363543" y="1221756"/>
-                  </a:lnTo>
-                  <a:lnTo>
-                    <a:pt x="2291920" y="1197017"/>
-                  </a:lnTo>
-                  <a:lnTo>
-                    <a:pt x="2220298" y="1171688"/>
-                  </a:lnTo>
-                  <a:lnTo>
-                    <a:pt x="2148675" y="1145753"/>
-                  </a:lnTo>
-                  <a:lnTo>
-                    <a:pt x="2077053" y="1119198"/>
-                  </a:lnTo>
-                  <a:lnTo>
-                    <a:pt x="2005430" y="1092008"/>
-                  </a:lnTo>
-                  <a:lnTo>
-                    <a:pt x="1933808" y="1064168"/>
-                  </a:lnTo>
-                  <a:lnTo>
-                    <a:pt x="1862185" y="1035662"/>
-                  </a:lnTo>
-                  <a:lnTo>
-                    <a:pt x="1790563" y="1006475"/>
-                  </a:lnTo>
-                  <a:lnTo>
-                    <a:pt x="1718940" y="976590"/>
-                  </a:lnTo>
-                  <a:lnTo>
-                    <a:pt x="1647318" y="945991"/>
-                  </a:lnTo>
-                  <a:lnTo>
-                    <a:pt x="1575695" y="914660"/>
-                  </a:lnTo>
-                  <a:lnTo>
-                    <a:pt x="1504073" y="882580"/>
-                  </a:lnTo>
-                  <a:lnTo>
-                    <a:pt x="1432450" y="849733"/>
-                  </a:lnTo>
-                  <a:lnTo>
-                    <a:pt x="1360827" y="816101"/>
-                  </a:lnTo>
-                  <a:lnTo>
-                    <a:pt x="1289205" y="781665"/>
-                  </a:lnTo>
-                  <a:lnTo>
-                    <a:pt x="1217582" y="746406"/>
-                  </a:lnTo>
-                  <a:lnTo>
-                    <a:pt x="1145960" y="710303"/>
-                  </a:lnTo>
-                  <a:lnTo>
-                    <a:pt x="1074337" y="673338"/>
-                  </a:lnTo>
-                  <a:lnTo>
-                    <a:pt x="1002715" y="635488"/>
-                  </a:lnTo>
-                  <a:lnTo>
-                    <a:pt x="931092" y="596734"/>
-                  </a:lnTo>
-                  <a:lnTo>
-                    <a:pt x="859470" y="557054"/>
-                  </a:lnTo>
-                  <a:lnTo>
-                    <a:pt x="787847" y="516424"/>
-                  </a:lnTo>
-                  <a:lnTo>
-                    <a:pt x="716225" y="474824"/>
-                  </a:lnTo>
-                  <a:lnTo>
-                    <a:pt x="644602" y="432229"/>
-                  </a:lnTo>
-                  <a:lnTo>
-                    <a:pt x="572980" y="388615"/>
-                  </a:lnTo>
-                  <a:lnTo>
-                    <a:pt x="501357" y="343959"/>
-                  </a:lnTo>
-                  <a:lnTo>
-                    <a:pt x="429735" y="298235"/>
-                  </a:lnTo>
-                  <a:lnTo>
-                    <a:pt x="358112" y="251418"/>
-                  </a:lnTo>
-                  <a:lnTo>
-                    <a:pt x="286490" y="203482"/>
-                  </a:lnTo>
-                  <a:lnTo>
-                    <a:pt x="214867" y="154400"/>
-                  </a:lnTo>
-                  <a:lnTo>
-                    <a:pt x="143245" y="104144"/>
-                  </a:lnTo>
-                  <a:lnTo>
-                    <a:pt x="71622" y="52687"/>
+                    <a:pt x="7019007" y="2248708"/>
+                  </a:lnTo>
+                  <a:lnTo>
+                    <a:pt x="6947385" y="2246984"/>
+                  </a:lnTo>
+                  <a:lnTo>
+                    <a:pt x="6875762" y="2245151"/>
+                  </a:lnTo>
+                  <a:lnTo>
+                    <a:pt x="6804139" y="2243202"/>
+                  </a:lnTo>
+                  <a:lnTo>
+                    <a:pt x="6732517" y="2241129"/>
+                  </a:lnTo>
+                  <a:lnTo>
+                    <a:pt x="6660894" y="2238925"/>
+                  </a:lnTo>
+                  <a:lnTo>
+                    <a:pt x="6589272" y="2236581"/>
+                  </a:lnTo>
+                  <a:lnTo>
+                    <a:pt x="6517649" y="2234089"/>
+                  </a:lnTo>
+                  <a:lnTo>
+                    <a:pt x="6446027" y="2231439"/>
+                  </a:lnTo>
+                  <a:lnTo>
+                    <a:pt x="6374404" y="2228622"/>
+                  </a:lnTo>
+                  <a:lnTo>
+                    <a:pt x="6302782" y="2225626"/>
+                  </a:lnTo>
+                  <a:lnTo>
+                    <a:pt x="6231159" y="2222440"/>
+                  </a:lnTo>
+                  <a:lnTo>
+                    <a:pt x="6159537" y="2219052"/>
+                  </a:lnTo>
+                  <a:lnTo>
+                    <a:pt x="6087914" y="2215450"/>
+                  </a:lnTo>
+                  <a:lnTo>
+                    <a:pt x="6016292" y="2211619"/>
+                  </a:lnTo>
+                  <a:lnTo>
+                    <a:pt x="5944669" y="2207547"/>
+                  </a:lnTo>
+                  <a:lnTo>
+                    <a:pt x="5873047" y="2203216"/>
+                  </a:lnTo>
+                  <a:lnTo>
+                    <a:pt x="5801424" y="2198610"/>
+                  </a:lnTo>
+                  <a:lnTo>
+                    <a:pt x="5729802" y="2193714"/>
+                  </a:lnTo>
+                  <a:lnTo>
+                    <a:pt x="5658179" y="2188507"/>
+                  </a:lnTo>
+                  <a:lnTo>
+                    <a:pt x="5586557" y="2182970"/>
+                  </a:lnTo>
+                  <a:lnTo>
+                    <a:pt x="5514934" y="2177082"/>
+                  </a:lnTo>
+                  <a:lnTo>
+                    <a:pt x="5443311" y="2170822"/>
+                  </a:lnTo>
+                  <a:lnTo>
+                    <a:pt x="5371689" y="2164165"/>
+                  </a:lnTo>
+                  <a:lnTo>
+                    <a:pt x="5300066" y="2157087"/>
+                  </a:lnTo>
+                  <a:lnTo>
+                    <a:pt x="5228444" y="2149560"/>
+                  </a:lnTo>
+                  <a:lnTo>
+                    <a:pt x="5156821" y="2141557"/>
+                  </a:lnTo>
+                  <a:lnTo>
+                    <a:pt x="5085199" y="2133046"/>
+                  </a:lnTo>
+                  <a:lnTo>
+                    <a:pt x="5013576" y="2123997"/>
+                  </a:lnTo>
+                  <a:lnTo>
+                    <a:pt x="4941954" y="2114375"/>
+                  </a:lnTo>
+                  <a:lnTo>
+                    <a:pt x="4870331" y="2104143"/>
+                  </a:lnTo>
+                  <a:lnTo>
+                    <a:pt x="4798709" y="2093263"/>
+                  </a:lnTo>
+                  <a:lnTo>
+                    <a:pt x="4727086" y="2081694"/>
+                  </a:lnTo>
+                  <a:lnTo>
+                    <a:pt x="4655464" y="2069392"/>
+                  </a:lnTo>
+                  <a:lnTo>
+                    <a:pt x="4583841" y="2056312"/>
+                  </a:lnTo>
+                  <a:lnTo>
+                    <a:pt x="4512219" y="2042402"/>
+                  </a:lnTo>
+                  <a:lnTo>
+                    <a:pt x="4440596" y="2027612"/>
+                  </a:lnTo>
+                  <a:lnTo>
+                    <a:pt x="4368974" y="2011886"/>
+                  </a:lnTo>
+                  <a:lnTo>
+                    <a:pt x="4297351" y="1995163"/>
+                  </a:lnTo>
+                  <a:lnTo>
+                    <a:pt x="4225729" y="1977381"/>
+                  </a:lnTo>
+                  <a:lnTo>
+                    <a:pt x="4154106" y="1958473"/>
+                  </a:lnTo>
+                  <a:lnTo>
+                    <a:pt x="4082483" y="1938367"/>
+                  </a:lnTo>
+                  <a:lnTo>
+                    <a:pt x="4010861" y="1916988"/>
+                  </a:lnTo>
+                  <a:lnTo>
+                    <a:pt x="3939238" y="1894255"/>
+                  </a:lnTo>
+                  <a:lnTo>
+                    <a:pt x="3867616" y="1870082"/>
+                  </a:lnTo>
+                  <a:lnTo>
+                    <a:pt x="3795993" y="1844378"/>
+                  </a:lnTo>
+                  <a:lnTo>
+                    <a:pt x="3724371" y="1817047"/>
+                  </a:lnTo>
+                  <a:lnTo>
+                    <a:pt x="3652748" y="1787984"/>
+                  </a:lnTo>
+                  <a:lnTo>
+                    <a:pt x="3581126" y="1757081"/>
+                  </a:lnTo>
+                  <a:lnTo>
+                    <a:pt x="3509503" y="1724220"/>
+                  </a:lnTo>
+                  <a:lnTo>
+                    <a:pt x="3437881" y="1689279"/>
+                  </a:lnTo>
+                  <a:lnTo>
+                    <a:pt x="3366258" y="1652124"/>
+                  </a:lnTo>
+                  <a:lnTo>
+                    <a:pt x="3294636" y="1612616"/>
+                  </a:lnTo>
+                  <a:lnTo>
+                    <a:pt x="3223013" y="1570606"/>
+                  </a:lnTo>
+                  <a:lnTo>
+                    <a:pt x="3151391" y="1525935"/>
+                  </a:lnTo>
+                  <a:lnTo>
+                    <a:pt x="3079768" y="1478436"/>
+                  </a:lnTo>
+                  <a:lnTo>
+                    <a:pt x="3008146" y="1439321"/>
+                  </a:lnTo>
+                  <a:lnTo>
+                    <a:pt x="2936523" y="1419147"/>
+                  </a:lnTo>
+                  <a:lnTo>
+                    <a:pt x="2864901" y="1398486"/>
+                  </a:lnTo>
+                  <a:lnTo>
+                    <a:pt x="2793278" y="1377327"/>
+                  </a:lnTo>
+                  <a:lnTo>
+                    <a:pt x="2721655" y="1355657"/>
+                  </a:lnTo>
+                  <a:lnTo>
+                    <a:pt x="2650033" y="1333465"/>
+                  </a:lnTo>
+                  <a:lnTo>
+                    <a:pt x="2578410" y="1310739"/>
+                  </a:lnTo>
+                  <a:lnTo>
+                    <a:pt x="2506788" y="1287463"/>
+                  </a:lnTo>
+                  <a:lnTo>
+                    <a:pt x="2435165" y="1263627"/>
+                  </a:lnTo>
+                  <a:lnTo>
+                    <a:pt x="2363543" y="1239216"/>
+                  </a:lnTo>
+                  <a:lnTo>
+                    <a:pt x="2291920" y="1214216"/>
+                  </a:lnTo>
+                  <a:lnTo>
+                    <a:pt x="2220298" y="1188614"/>
+                  </a:lnTo>
+                  <a:lnTo>
+                    <a:pt x="2148675" y="1162394"/>
+                  </a:lnTo>
+                  <a:lnTo>
+                    <a:pt x="2077053" y="1135541"/>
+                  </a:lnTo>
+                  <a:lnTo>
+                    <a:pt x="2005430" y="1108042"/>
+                  </a:lnTo>
+                  <a:lnTo>
+                    <a:pt x="1933808" y="1079879"/>
+                  </a:lnTo>
+                  <a:lnTo>
+                    <a:pt x="1862185" y="1051036"/>
+                  </a:lnTo>
+                  <a:lnTo>
+                    <a:pt x="1790563" y="1021499"/>
+                  </a:lnTo>
+                  <a:lnTo>
+                    <a:pt x="1718940" y="991249"/>
+                  </a:lnTo>
+                  <a:lnTo>
+                    <a:pt x="1647318" y="960270"/>
+                  </a:lnTo>
+                  <a:lnTo>
+                    <a:pt x="1575695" y="928543"/>
+                  </a:lnTo>
+                  <a:lnTo>
+                    <a:pt x="1504073" y="896052"/>
+                  </a:lnTo>
+                  <a:lnTo>
+                    <a:pt x="1432450" y="862777"/>
+                  </a:lnTo>
+                  <a:lnTo>
+                    <a:pt x="1360827" y="828699"/>
+                  </a:lnTo>
+                  <a:lnTo>
+                    <a:pt x="1289205" y="793800"/>
+                  </a:lnTo>
+                  <a:lnTo>
+                    <a:pt x="1217582" y="758060"/>
+                  </a:lnTo>
+                  <a:lnTo>
+                    <a:pt x="1145960" y="721457"/>
+                  </a:lnTo>
+                  <a:lnTo>
+                    <a:pt x="1074337" y="683972"/>
+                  </a:lnTo>
+                  <a:lnTo>
+                    <a:pt x="1002715" y="645583"/>
+                  </a:lnTo>
+                  <a:lnTo>
+                    <a:pt x="931092" y="606268"/>
+                  </a:lnTo>
+                  <a:lnTo>
+                    <a:pt x="859470" y="566005"/>
+                  </a:lnTo>
+                  <a:lnTo>
+                    <a:pt x="787847" y="524771"/>
+                  </a:lnTo>
+                  <a:lnTo>
+                    <a:pt x="716225" y="482543"/>
+                  </a:lnTo>
+                  <a:lnTo>
+                    <a:pt x="644602" y="439296"/>
+                  </a:lnTo>
+                  <a:lnTo>
+                    <a:pt x="572980" y="395007"/>
+                  </a:lnTo>
+                  <a:lnTo>
+                    <a:pt x="501357" y="349649"/>
+                  </a:lnTo>
+                  <a:lnTo>
+                    <a:pt x="429735" y="303198"/>
+                  </a:lnTo>
+                  <a:lnTo>
+                    <a:pt x="358112" y="255627"/>
+                  </a:lnTo>
+                  <a:lnTo>
+                    <a:pt x="286490" y="206908"/>
+                  </a:lnTo>
+                  <a:lnTo>
+                    <a:pt x="214867" y="157015"/>
+                  </a:lnTo>
+                  <a:lnTo>
+                    <a:pt x="143245" y="105919"/>
+                  </a:lnTo>
+                  <a:lnTo>
+                    <a:pt x="71622" y="53590"/>
                   </a:lnTo>
                   <a:lnTo>
                     <a:pt x="0" y="0"/>
@@ -4562,288 +4562,288 @@
           </p:nvSpPr>
           <p:spPr>
             <a:xfrm>
-              <a:off x="1784435" y="2073503"/>
-              <a:ext cx="6478244" cy="3408782"/>
+              <a:off x="1794575" y="2073503"/>
+              <a:ext cx="6468103" cy="3409539"/>
             </a:xfrm>
             <a:custGeom>
               <a:avLst/>
               <a:pathLst>
-                <a:path w="6478244" h="3408782">
+                <a:path w="6468103" h="3409539">
                   <a:moveTo>
                     <a:pt x="0" y="0"/>
                   </a:moveTo>
                   <a:lnTo>
-                    <a:pt x="32216" y="66635"/>
-                  </a:lnTo>
-                  <a:lnTo>
-                    <a:pt x="103839" y="208621"/>
-                  </a:lnTo>
-                  <a:lnTo>
-                    <a:pt x="175461" y="344706"/>
-                  </a:lnTo>
-                  <a:lnTo>
-                    <a:pt x="247084" y="475138"/>
-                  </a:lnTo>
-                  <a:lnTo>
-                    <a:pt x="318706" y="600149"/>
-                  </a:lnTo>
-                  <a:lnTo>
-                    <a:pt x="390329" y="719967"/>
-                  </a:lnTo>
-                  <a:lnTo>
-                    <a:pt x="461951" y="834805"/>
-                  </a:lnTo>
-                  <a:lnTo>
-                    <a:pt x="533574" y="944872"/>
-                  </a:lnTo>
-                  <a:lnTo>
-                    <a:pt x="605196" y="1050366"/>
-                  </a:lnTo>
-                  <a:lnTo>
-                    <a:pt x="676819" y="1151476"/>
-                  </a:lnTo>
-                  <a:lnTo>
-                    <a:pt x="748441" y="1248385"/>
-                  </a:lnTo>
-                  <a:lnTo>
-                    <a:pt x="820064" y="1341267"/>
-                  </a:lnTo>
-                  <a:lnTo>
-                    <a:pt x="891686" y="1430290"/>
-                  </a:lnTo>
-                  <a:lnTo>
-                    <a:pt x="963309" y="1515614"/>
-                  </a:lnTo>
-                  <a:lnTo>
-                    <a:pt x="1034932" y="1597393"/>
-                  </a:lnTo>
-                  <a:lnTo>
-                    <a:pt x="1106554" y="1675773"/>
-                  </a:lnTo>
-                  <a:lnTo>
-                    <a:pt x="1178177" y="1750897"/>
-                  </a:lnTo>
-                  <a:lnTo>
-                    <a:pt x="1249799" y="1822899"/>
-                  </a:lnTo>
-                  <a:lnTo>
-                    <a:pt x="1321422" y="1891910"/>
-                  </a:lnTo>
-                  <a:lnTo>
-                    <a:pt x="1393044" y="1958052"/>
-                  </a:lnTo>
-                  <a:lnTo>
-                    <a:pt x="1464667" y="2021447"/>
-                  </a:lnTo>
-                  <a:lnTo>
-                    <a:pt x="1536289" y="2082208"/>
-                  </a:lnTo>
-                  <a:lnTo>
-                    <a:pt x="1607912" y="2140443"/>
-                  </a:lnTo>
-                  <a:lnTo>
-                    <a:pt x="1679534" y="2196259"/>
-                  </a:lnTo>
-                  <a:lnTo>
-                    <a:pt x="1751157" y="2249756"/>
-                  </a:lnTo>
-                  <a:lnTo>
-                    <a:pt x="1822779" y="2301030"/>
-                  </a:lnTo>
-                  <a:lnTo>
-                    <a:pt x="1894402" y="2350174"/>
-                  </a:lnTo>
-                  <a:lnTo>
-                    <a:pt x="1966024" y="2397275"/>
-                  </a:lnTo>
-                  <a:lnTo>
-                    <a:pt x="2037647" y="2442419"/>
-                  </a:lnTo>
-                  <a:lnTo>
-                    <a:pt x="2109269" y="2485688"/>
-                  </a:lnTo>
-                  <a:lnTo>
-                    <a:pt x="2180892" y="2527159"/>
-                  </a:lnTo>
-                  <a:lnTo>
-                    <a:pt x="2252514" y="2566906"/>
-                  </a:lnTo>
-                  <a:lnTo>
-                    <a:pt x="2324137" y="2605002"/>
-                  </a:lnTo>
-                  <a:lnTo>
-                    <a:pt x="2395760" y="2641515"/>
-                  </a:lnTo>
-                  <a:lnTo>
-                    <a:pt x="2467382" y="2676511"/>
-                  </a:lnTo>
-                  <a:lnTo>
-                    <a:pt x="2539005" y="2710053"/>
-                  </a:lnTo>
-                  <a:lnTo>
-                    <a:pt x="2610627" y="2742201"/>
-                  </a:lnTo>
-                  <a:lnTo>
-                    <a:pt x="2682250" y="2773013"/>
-                  </a:lnTo>
-                  <a:lnTo>
-                    <a:pt x="2753872" y="2802545"/>
-                  </a:lnTo>
-                  <a:lnTo>
-                    <a:pt x="2825495" y="2830850"/>
-                  </a:lnTo>
-                  <a:lnTo>
-                    <a:pt x="2897117" y="2857978"/>
-                  </a:lnTo>
-                  <a:lnTo>
-                    <a:pt x="2968740" y="2883980"/>
-                  </a:lnTo>
-                  <a:lnTo>
-                    <a:pt x="3040362" y="2908901"/>
-                  </a:lnTo>
-                  <a:lnTo>
-                    <a:pt x="3111985" y="2932786"/>
-                  </a:lnTo>
-                  <a:lnTo>
-                    <a:pt x="3183607" y="2955680"/>
-                  </a:lnTo>
-                  <a:lnTo>
-                    <a:pt x="3255230" y="2977621"/>
-                  </a:lnTo>
-                  <a:lnTo>
-                    <a:pt x="3326852" y="2998652"/>
-                  </a:lnTo>
-                  <a:lnTo>
-                    <a:pt x="3398475" y="3018808"/>
-                  </a:lnTo>
-                  <a:lnTo>
-                    <a:pt x="3470097" y="3038127"/>
-                  </a:lnTo>
-                  <a:lnTo>
-                    <a:pt x="3541720" y="3056643"/>
-                  </a:lnTo>
-                  <a:lnTo>
-                    <a:pt x="3613342" y="3074390"/>
-                  </a:lnTo>
-                  <a:lnTo>
-                    <a:pt x="3684965" y="3091399"/>
-                  </a:lnTo>
-                  <a:lnTo>
-                    <a:pt x="3756588" y="3107701"/>
-                  </a:lnTo>
-                  <a:lnTo>
-                    <a:pt x="3828210" y="3123327"/>
-                  </a:lnTo>
-                  <a:lnTo>
-                    <a:pt x="3899833" y="3138303"/>
-                  </a:lnTo>
-                  <a:lnTo>
-                    <a:pt x="3971455" y="3152656"/>
-                  </a:lnTo>
-                  <a:lnTo>
-                    <a:pt x="4043078" y="3166413"/>
-                  </a:lnTo>
-                  <a:lnTo>
-                    <a:pt x="4114700" y="3179599"/>
-                  </a:lnTo>
-                  <a:lnTo>
-                    <a:pt x="4186323" y="3192237"/>
-                  </a:lnTo>
-                  <a:lnTo>
-                    <a:pt x="4257945" y="3204349"/>
-                  </a:lnTo>
-                  <a:lnTo>
-                    <a:pt x="4329568" y="3215959"/>
-                  </a:lnTo>
-                  <a:lnTo>
-                    <a:pt x="4401190" y="3227086"/>
-                  </a:lnTo>
-                  <a:lnTo>
-                    <a:pt x="4472813" y="3237750"/>
-                  </a:lnTo>
-                  <a:lnTo>
-                    <a:pt x="4544435" y="3247972"/>
-                  </a:lnTo>
-                  <a:lnTo>
-                    <a:pt x="4616058" y="3257768"/>
-                  </a:lnTo>
-                  <a:lnTo>
-                    <a:pt x="4687680" y="3267158"/>
-                  </a:lnTo>
-                  <a:lnTo>
-                    <a:pt x="4759303" y="3276158"/>
-                  </a:lnTo>
-                  <a:lnTo>
-                    <a:pt x="4830925" y="3284783"/>
-                  </a:lnTo>
-                  <a:lnTo>
-                    <a:pt x="4902548" y="3293050"/>
-                  </a:lnTo>
-                  <a:lnTo>
-                    <a:pt x="4974170" y="3300974"/>
-                  </a:lnTo>
-                  <a:lnTo>
-                    <a:pt x="5045793" y="3308569"/>
-                  </a:lnTo>
-                  <a:lnTo>
-                    <a:pt x="5117416" y="3315847"/>
-                  </a:lnTo>
-                  <a:lnTo>
-                    <a:pt x="5189038" y="3322824"/>
-                  </a:lnTo>
-                  <a:lnTo>
-                    <a:pt x="5260661" y="3329510"/>
-                  </a:lnTo>
-                  <a:lnTo>
-                    <a:pt x="5332283" y="3335919"/>
-                  </a:lnTo>
-                  <a:lnTo>
-                    <a:pt x="5403906" y="3342062"/>
-                  </a:lnTo>
-                  <a:lnTo>
-                    <a:pt x="5475528" y="3347949"/>
-                  </a:lnTo>
-                  <a:lnTo>
-                    <a:pt x="5547151" y="3353591"/>
-                  </a:lnTo>
-                  <a:lnTo>
-                    <a:pt x="5618773" y="3358999"/>
-                  </a:lnTo>
-                  <a:lnTo>
-                    <a:pt x="5690396" y="3364183"/>
-                  </a:lnTo>
-                  <a:lnTo>
-                    <a:pt x="5762018" y="3369151"/>
-                  </a:lnTo>
-                  <a:lnTo>
-                    <a:pt x="5833641" y="3373912"/>
-                  </a:lnTo>
-                  <a:lnTo>
-                    <a:pt x="5905263" y="3378476"/>
-                  </a:lnTo>
-                  <a:lnTo>
-                    <a:pt x="5976886" y="3382850"/>
-                  </a:lnTo>
-                  <a:lnTo>
-                    <a:pt x="6048508" y="3387043"/>
-                  </a:lnTo>
-                  <a:lnTo>
-                    <a:pt x="6120131" y="3391061"/>
-                  </a:lnTo>
-                  <a:lnTo>
-                    <a:pt x="6191753" y="3394912"/>
-                  </a:lnTo>
-                  <a:lnTo>
-                    <a:pt x="6263376" y="3398603"/>
-                  </a:lnTo>
-                  <a:lnTo>
-                    <a:pt x="6334998" y="3402141"/>
-                  </a:lnTo>
-                  <a:lnTo>
-                    <a:pt x="6406621" y="3405532"/>
-                  </a:lnTo>
-                  <a:lnTo>
-                    <a:pt x="6478244" y="3408782"/>
+                    <a:pt x="22076" y="46134"/>
+                  </a:lnTo>
+                  <a:lnTo>
+                    <a:pt x="93699" y="189562"/>
+                  </a:lnTo>
+                  <a:lnTo>
+                    <a:pt x="165321" y="327006"/>
+                  </a:lnTo>
+                  <a:lnTo>
+                    <a:pt x="236944" y="458715"/>
+                  </a:lnTo>
+                  <a:lnTo>
+                    <a:pt x="308566" y="584929"/>
+                  </a:lnTo>
+                  <a:lnTo>
+                    <a:pt x="380189" y="705877"/>
+                  </a:lnTo>
+                  <a:lnTo>
+                    <a:pt x="451811" y="821778"/>
+                  </a:lnTo>
+                  <a:lnTo>
+                    <a:pt x="523434" y="932844"/>
+                  </a:lnTo>
+                  <a:lnTo>
+                    <a:pt x="595056" y="1039276"/>
+                  </a:lnTo>
+                  <a:lnTo>
+                    <a:pt x="666679" y="1141267"/>
+                  </a:lnTo>
+                  <a:lnTo>
+                    <a:pt x="738301" y="1239003"/>
+                  </a:lnTo>
+                  <a:lnTo>
+                    <a:pt x="809924" y="1332660"/>
+                  </a:lnTo>
+                  <a:lnTo>
+                    <a:pt x="881546" y="1422411"/>
+                  </a:lnTo>
+                  <a:lnTo>
+                    <a:pt x="953169" y="1508416"/>
+                  </a:lnTo>
+                  <a:lnTo>
+                    <a:pt x="1024791" y="1590833"/>
+                  </a:lnTo>
+                  <a:lnTo>
+                    <a:pt x="1096414" y="1669811"/>
+                  </a:lnTo>
+                  <a:lnTo>
+                    <a:pt x="1168036" y="1745495"/>
+                  </a:lnTo>
+                  <a:lnTo>
+                    <a:pt x="1239659" y="1818020"/>
+                  </a:lnTo>
+                  <a:lnTo>
+                    <a:pt x="1311282" y="1887519"/>
+                  </a:lnTo>
+                  <a:lnTo>
+                    <a:pt x="1382904" y="1954119"/>
+                  </a:lnTo>
+                  <a:lnTo>
+                    <a:pt x="1454527" y="2017940"/>
+                  </a:lnTo>
+                  <a:lnTo>
+                    <a:pt x="1526149" y="2079098"/>
+                  </a:lnTo>
+                  <a:lnTo>
+                    <a:pt x="1597772" y="2137704"/>
+                  </a:lnTo>
+                  <a:lnTo>
+                    <a:pt x="1669394" y="2193866"/>
+                  </a:lnTo>
+                  <a:lnTo>
+                    <a:pt x="1741017" y="2247683"/>
+                  </a:lnTo>
+                  <a:lnTo>
+                    <a:pt x="1812639" y="2299256"/>
+                  </a:lnTo>
+                  <a:lnTo>
+                    <a:pt x="1884262" y="2348677"/>
+                  </a:lnTo>
+                  <a:lnTo>
+                    <a:pt x="1955884" y="2396035"/>
+                  </a:lnTo>
+                  <a:lnTo>
+                    <a:pt x="2027507" y="2441418"/>
+                  </a:lnTo>
+                  <a:lnTo>
+                    <a:pt x="2099129" y="2484907"/>
+                  </a:lnTo>
+                  <a:lnTo>
+                    <a:pt x="2170752" y="2526582"/>
+                  </a:lnTo>
+                  <a:lnTo>
+                    <a:pt x="2242374" y="2566518"/>
+                  </a:lnTo>
+                  <a:lnTo>
+                    <a:pt x="2313997" y="2604788"/>
+                  </a:lnTo>
+                  <a:lnTo>
+                    <a:pt x="2385619" y="2641461"/>
+                  </a:lnTo>
+                  <a:lnTo>
+                    <a:pt x="2457242" y="2676603"/>
+                  </a:lnTo>
+                  <a:lnTo>
+                    <a:pt x="2528864" y="2710280"/>
+                  </a:lnTo>
+                  <a:lnTo>
+                    <a:pt x="2600487" y="2742552"/>
+                  </a:lnTo>
+                  <a:lnTo>
+                    <a:pt x="2672110" y="2773477"/>
+                  </a:lnTo>
+                  <a:lnTo>
+                    <a:pt x="2743732" y="2803111"/>
+                  </a:lnTo>
+                  <a:lnTo>
+                    <a:pt x="2815355" y="2831510"/>
+                  </a:lnTo>
+                  <a:lnTo>
+                    <a:pt x="2886977" y="2858723"/>
+                  </a:lnTo>
+                  <a:lnTo>
+                    <a:pt x="2958600" y="2884801"/>
+                  </a:lnTo>
+                  <a:lnTo>
+                    <a:pt x="3030222" y="2909791"/>
+                  </a:lnTo>
+                  <a:lnTo>
+                    <a:pt x="3101845" y="2933738"/>
+                  </a:lnTo>
+                  <a:lnTo>
+                    <a:pt x="3173467" y="2956686"/>
+                  </a:lnTo>
+                  <a:lnTo>
+                    <a:pt x="3245090" y="2978677"/>
+                  </a:lnTo>
+                  <a:lnTo>
+                    <a:pt x="3316712" y="2999750"/>
+                  </a:lnTo>
+                  <a:lnTo>
+                    <a:pt x="3388335" y="3019944"/>
+                  </a:lnTo>
+                  <a:lnTo>
+                    <a:pt x="3459957" y="3039295"/>
+                  </a:lnTo>
+                  <a:lnTo>
+                    <a:pt x="3531580" y="3057839"/>
+                  </a:lnTo>
+                  <a:lnTo>
+                    <a:pt x="3603202" y="3075609"/>
+                  </a:lnTo>
+                  <a:lnTo>
+                    <a:pt x="3674825" y="3092638"/>
+                  </a:lnTo>
+                  <a:lnTo>
+                    <a:pt x="3746447" y="3108956"/>
+                  </a:lnTo>
+                  <a:lnTo>
+                    <a:pt x="3818070" y="3124594"/>
+                  </a:lnTo>
+                  <a:lnTo>
+                    <a:pt x="3889692" y="3139579"/>
+                  </a:lnTo>
+                  <a:lnTo>
+                    <a:pt x="3961315" y="3153938"/>
+                  </a:lnTo>
+                  <a:lnTo>
+                    <a:pt x="4032937" y="3167699"/>
+                  </a:lnTo>
+                  <a:lnTo>
+                    <a:pt x="4104560" y="3180886"/>
+                  </a:lnTo>
+                  <a:lnTo>
+                    <a:pt x="4176183" y="3193522"/>
+                  </a:lnTo>
+                  <a:lnTo>
+                    <a:pt x="4247805" y="3205631"/>
+                  </a:lnTo>
+                  <a:lnTo>
+                    <a:pt x="4319428" y="3217235"/>
+                  </a:lnTo>
+                  <a:lnTo>
+                    <a:pt x="4391050" y="3228355"/>
+                  </a:lnTo>
+                  <a:lnTo>
+                    <a:pt x="4462673" y="3239010"/>
+                  </a:lnTo>
+                  <a:lnTo>
+                    <a:pt x="4534295" y="3249221"/>
+                  </a:lnTo>
+                  <a:lnTo>
+                    <a:pt x="4605918" y="3259007"/>
+                  </a:lnTo>
+                  <a:lnTo>
+                    <a:pt x="4677540" y="3268383"/>
+                  </a:lnTo>
+                  <a:lnTo>
+                    <a:pt x="4749163" y="3277369"/>
+                  </a:lnTo>
+                  <a:lnTo>
+                    <a:pt x="4820785" y="3285980"/>
+                  </a:lnTo>
+                  <a:lnTo>
+                    <a:pt x="4892408" y="3294231"/>
+                  </a:lnTo>
+                  <a:lnTo>
+                    <a:pt x="4964030" y="3302138"/>
+                  </a:lnTo>
+                  <a:lnTo>
+                    <a:pt x="5035653" y="3309716"/>
+                  </a:lnTo>
+                  <a:lnTo>
+                    <a:pt x="5107275" y="3316977"/>
+                  </a:lnTo>
+                  <a:lnTo>
+                    <a:pt x="5178898" y="3323935"/>
+                  </a:lnTo>
+                  <a:lnTo>
+                    <a:pt x="5250520" y="3330603"/>
+                  </a:lnTo>
+                  <a:lnTo>
+                    <a:pt x="5322143" y="3336992"/>
+                  </a:lnTo>
+                  <a:lnTo>
+                    <a:pt x="5393765" y="3343115"/>
+                  </a:lnTo>
+                  <a:lnTo>
+                    <a:pt x="5465388" y="3348983"/>
+                  </a:lnTo>
+                  <a:lnTo>
+                    <a:pt x="5537011" y="3354606"/>
+                  </a:lnTo>
+                  <a:lnTo>
+                    <a:pt x="5608633" y="3359994"/>
+                  </a:lnTo>
+                  <a:lnTo>
+                    <a:pt x="5680256" y="3365157"/>
+                  </a:lnTo>
+                  <a:lnTo>
+                    <a:pt x="5751878" y="3370105"/>
+                  </a:lnTo>
+                  <a:lnTo>
+                    <a:pt x="5823501" y="3374847"/>
+                  </a:lnTo>
+                  <a:lnTo>
+                    <a:pt x="5895123" y="3379390"/>
+                  </a:lnTo>
+                  <a:lnTo>
+                    <a:pt x="5966746" y="3383744"/>
+                  </a:lnTo>
+                  <a:lnTo>
+                    <a:pt x="6038368" y="3387917"/>
+                  </a:lnTo>
+                  <a:lnTo>
+                    <a:pt x="6109991" y="3391915"/>
+                  </a:lnTo>
+                  <a:lnTo>
+                    <a:pt x="6181613" y="3395747"/>
+                  </a:lnTo>
+                  <a:lnTo>
+                    <a:pt x="6253236" y="3399418"/>
+                  </a:lnTo>
+                  <a:lnTo>
+                    <a:pt x="6324858" y="3402937"/>
+                  </a:lnTo>
+                  <a:lnTo>
+                    <a:pt x="6396481" y="3406308"/>
+                  </a:lnTo>
+                  <a:lnTo>
+                    <a:pt x="6468103" y="3409539"/>
                   </a:lnTo>
                 </a:path>
               </a:pathLst>
@@ -5813,7 +5813,7 @@
                   <a:latin typeface="Helvetica"/>
                   <a:cs typeface="Helvetica"/>
                 </a:rPr>
-                <a:t>HR per 10 % decline: 1.68 (1.33-2.12), p_Bonf = &lt;0.001 (n = 6)  |  per IQR decline (Δ = 27.5 %): 4.16 (2.21-7.82)  |  IQR: [-29.1, -1.6] %</a:t>
+                <a:t>HR per 10 % decline: 1.68 (1.34-2.12), p_Bonf = &lt;0.001 (n = 6)  |  per IQR decline (Δ = 27.5 %): 4.18 (2.23-7.86)  |  IQR: [-29.1, -1.6] %</a:t>
               </a:r>
             </a:p>
           </p:txBody>
